--- a/简历.pptx
+++ b/简历.pptx
@@ -197,7 +197,7 @@
           <a:p>
             <a:fld id="{0BE7DB68-C3DE-4005-A345-EC79EE75BF95}" type="datetimeFigureOut">
               <a:rPr lang="zh-CN" altLang="en-US" smtClean="0"/>
-              <a:t>2022/5/24</a:t>
+              <a:t>2022/8/7</a:t>
             </a:fld>
             <a:endParaRPr lang="zh-CN" altLang="en-US"/>
           </a:p>
@@ -679,7 +679,7 @@
           <a:p>
             <a:fld id="{9C780448-4F8B-4562-AA03-CE48F3C559E5}" type="datetimeFigureOut">
               <a:rPr lang="zh-CN" altLang="en-US" smtClean="0"/>
-              <a:t>2022/5/24</a:t>
+              <a:t>2022/8/7</a:t>
             </a:fld>
             <a:endParaRPr lang="zh-CN" altLang="en-US"/>
           </a:p>
@@ -849,7 +849,7 @@
           <a:p>
             <a:fld id="{9C780448-4F8B-4562-AA03-CE48F3C559E5}" type="datetimeFigureOut">
               <a:rPr lang="zh-CN" altLang="en-US" smtClean="0"/>
-              <a:t>2022/5/24</a:t>
+              <a:t>2022/8/7</a:t>
             </a:fld>
             <a:endParaRPr lang="zh-CN" altLang="en-US"/>
           </a:p>
@@ -1029,7 +1029,7 @@
           <a:p>
             <a:fld id="{9C780448-4F8B-4562-AA03-CE48F3C559E5}" type="datetimeFigureOut">
               <a:rPr lang="zh-CN" altLang="en-US" smtClean="0"/>
-              <a:t>2022/5/24</a:t>
+              <a:t>2022/8/7</a:t>
             </a:fld>
             <a:endParaRPr lang="zh-CN" altLang="en-US"/>
           </a:p>
@@ -1199,7 +1199,7 @@
           <a:p>
             <a:fld id="{9C780448-4F8B-4562-AA03-CE48F3C559E5}" type="datetimeFigureOut">
               <a:rPr lang="zh-CN" altLang="en-US" smtClean="0"/>
-              <a:t>2022/5/24</a:t>
+              <a:t>2022/8/7</a:t>
             </a:fld>
             <a:endParaRPr lang="zh-CN" altLang="en-US"/>
           </a:p>
@@ -1443,7 +1443,7 @@
           <a:p>
             <a:fld id="{9C780448-4F8B-4562-AA03-CE48F3C559E5}" type="datetimeFigureOut">
               <a:rPr lang="zh-CN" altLang="en-US" smtClean="0"/>
-              <a:t>2022/5/24</a:t>
+              <a:t>2022/8/7</a:t>
             </a:fld>
             <a:endParaRPr lang="zh-CN" altLang="en-US"/>
           </a:p>
@@ -1675,7 +1675,7 @@
           <a:p>
             <a:fld id="{9C780448-4F8B-4562-AA03-CE48F3C559E5}" type="datetimeFigureOut">
               <a:rPr lang="zh-CN" altLang="en-US" smtClean="0"/>
-              <a:t>2022/5/24</a:t>
+              <a:t>2022/8/7</a:t>
             </a:fld>
             <a:endParaRPr lang="zh-CN" altLang="en-US"/>
           </a:p>
@@ -2042,7 +2042,7 @@
           <a:p>
             <a:fld id="{9C780448-4F8B-4562-AA03-CE48F3C559E5}" type="datetimeFigureOut">
               <a:rPr lang="zh-CN" altLang="en-US" smtClean="0"/>
-              <a:t>2022/5/24</a:t>
+              <a:t>2022/8/7</a:t>
             </a:fld>
             <a:endParaRPr lang="zh-CN" altLang="en-US"/>
           </a:p>
@@ -2160,7 +2160,7 @@
           <a:p>
             <a:fld id="{9C780448-4F8B-4562-AA03-CE48F3C559E5}" type="datetimeFigureOut">
               <a:rPr lang="zh-CN" altLang="en-US" smtClean="0"/>
-              <a:t>2022/5/24</a:t>
+              <a:t>2022/8/7</a:t>
             </a:fld>
             <a:endParaRPr lang="zh-CN" altLang="en-US"/>
           </a:p>
@@ -2255,7 +2255,7 @@
           <a:p>
             <a:fld id="{9C780448-4F8B-4562-AA03-CE48F3C559E5}" type="datetimeFigureOut">
               <a:rPr lang="zh-CN" altLang="en-US" smtClean="0"/>
-              <a:t>2022/5/24</a:t>
+              <a:t>2022/8/7</a:t>
             </a:fld>
             <a:endParaRPr lang="zh-CN" altLang="en-US"/>
           </a:p>
@@ -2532,7 +2532,7 @@
           <a:p>
             <a:fld id="{9C780448-4F8B-4562-AA03-CE48F3C559E5}" type="datetimeFigureOut">
               <a:rPr lang="zh-CN" altLang="en-US" smtClean="0"/>
-              <a:t>2022/5/24</a:t>
+              <a:t>2022/8/7</a:t>
             </a:fld>
             <a:endParaRPr lang="zh-CN" altLang="en-US"/>
           </a:p>
@@ -2789,7 +2789,7 @@
           <a:p>
             <a:fld id="{9C780448-4F8B-4562-AA03-CE48F3C559E5}" type="datetimeFigureOut">
               <a:rPr lang="zh-CN" altLang="en-US" smtClean="0"/>
-              <a:t>2022/5/24</a:t>
+              <a:t>2022/8/7</a:t>
             </a:fld>
             <a:endParaRPr lang="zh-CN" altLang="en-US"/>
           </a:p>
@@ -3002,7 +3002,7 @@
           <a:p>
             <a:fld id="{9C780448-4F8B-4562-AA03-CE48F3C559E5}" type="datetimeFigureOut">
               <a:rPr lang="zh-CN" altLang="en-US" smtClean="0"/>
-              <a:t>2022/5/24</a:t>
+              <a:t>2022/8/7</a:t>
             </a:fld>
             <a:endParaRPr lang="zh-CN" altLang="en-US"/>
           </a:p>
@@ -4016,7 +4016,7 @@
         </p:nvSpPr>
         <p:spPr>
           <a:xfrm>
-            <a:off x="5631693" y="891569"/>
+            <a:off x="5770411" y="891569"/>
             <a:ext cx="962146" cy="1353438"/>
           </a:xfrm>
           <a:prstGeom prst="rect">
@@ -4062,7 +4062,7 @@
         </p:nvSpPr>
         <p:spPr>
           <a:xfrm>
-            <a:off x="478841" y="1241029"/>
+            <a:off x="217805" y="1204198"/>
             <a:ext cx="1357378" cy="523220"/>
           </a:xfrm>
           <a:prstGeom prst="rect">
@@ -4757,7 +4757,7 @@
         </p:nvGrpSpPr>
         <p:grpSpPr>
           <a:xfrm>
-            <a:off x="299863" y="3006337"/>
+            <a:off x="302298" y="3182674"/>
             <a:ext cx="6293976" cy="354272"/>
             <a:chOff x="305855" y="4091574"/>
             <a:chExt cx="6293976" cy="354272"/>
@@ -6270,7 +6270,7 @@
         <p:spPr>
           <a:xfrm>
             <a:off x="578486" y="8739722"/>
-            <a:ext cx="6548889" cy="1025922"/>
+            <a:ext cx="6548889" cy="687368"/>
           </a:xfrm>
           <a:prstGeom prst="rect">
             <a:avLst/>
@@ -6302,100 +6302,52 @@
               </a:rPr>
             </a:br>
             <a:r>
-              <a:rPr lang="zh-CN" altLang="zh-CN" sz="1100" b="1" dirty="0">
+              <a:rPr lang="en-US" altLang="zh-CN" sz="1100" b="1" dirty="0">
                 <a:solidFill>
                   <a:srgbClr val="000000"/>
                 </a:solidFill>
                 <a:effectLst/>
                 <a:latin typeface="Cambria" panose="02040503050406030204" pitchFamily="18" charset="0"/>
                 <a:ea typeface="宋体" panose="02010600030101010101" pitchFamily="2" charset="-122"/>
-                <a:cs typeface="宋体" panose="02010600030101010101" pitchFamily="2" charset="-122"/>
-              </a:rPr>
-              <a:t>西电浪潮俱乐部</a:t>
-            </a:r>
-            <a:r>
-              <a:rPr lang="zh-CN" altLang="zh-CN" sz="1100" b="1" spc="-175" dirty="0">
-                <a:effectLst/>
-                <a:latin typeface="Cambria" panose="02040503050406030204" pitchFamily="18" charset="0"/>
-                <a:ea typeface="宋体" panose="02010600030101010101" pitchFamily="2" charset="-122"/>
-                <a:cs typeface="宋体" panose="02010600030101010101" pitchFamily="2" charset="-122"/>
-              </a:rPr>
-              <a:t> </a:t>
-            </a:r>
-            <a:r>
-              <a:rPr lang="en-US" altLang="zh-CN" sz="1100" b="1" dirty="0">
-                <a:solidFill>
-                  <a:srgbClr val="000000"/>
-                </a:solidFill>
-                <a:effectLst/>
-                <a:latin typeface="Calibri" panose="020F0502020204030204" pitchFamily="34" charset="0"/>
-                <a:ea typeface="Calibri" panose="020F0502020204030204" pitchFamily="34" charset="0"/>
                 <a:cs typeface="Times New Roman" panose="02020603050405020304" pitchFamily="18" charset="0"/>
               </a:rPr>
-              <a:t>AI</a:t>
-            </a:r>
-            <a:r>
-              <a:rPr lang="en-US" altLang="zh-CN" sz="1100" b="1" spc="-80" dirty="0">
-                <a:effectLst/>
-                <a:latin typeface="Calibri" panose="020F0502020204030204" pitchFamily="34" charset="0"/>
-                <a:ea typeface="Calibri" panose="020F0502020204030204" pitchFamily="34" charset="0"/>
-                <a:cs typeface="Times New Roman" panose="02020603050405020304" pitchFamily="18" charset="0"/>
-              </a:rPr>
-              <a:t> </a:t>
-            </a:r>
-            <a:r>
-              <a:rPr lang="zh-CN" altLang="zh-CN" sz="1100" b="1" dirty="0">
+              <a:t>2022.03 </a:t>
+            </a:r>
+            <a:r>
+              <a:rPr lang="zh-CN" altLang="en-US" sz="1100" b="1" dirty="0">
                 <a:solidFill>
                   <a:srgbClr val="000000"/>
                 </a:solidFill>
                 <a:effectLst/>
                 <a:latin typeface="Cambria" panose="02040503050406030204" pitchFamily="18" charset="0"/>
                 <a:ea typeface="宋体" panose="02010600030101010101" pitchFamily="2" charset="-122"/>
-                <a:cs typeface="宋体" panose="02010600030101010101" pitchFamily="2" charset="-122"/>
-              </a:rPr>
-              <a:t>组核心成员，目前进行了关于方向调研，和</a:t>
-            </a:r>
-            <a:r>
-              <a:rPr lang="zh-CN" altLang="zh-CN" sz="1100" b="1" spc="-175" dirty="0">
-                <a:effectLst/>
-                <a:latin typeface="Cambria" panose="02040503050406030204" pitchFamily="18" charset="0"/>
-                <a:ea typeface="宋体" panose="02010600030101010101" pitchFamily="2" charset="-122"/>
-                <a:cs typeface="宋体" panose="02010600030101010101" pitchFamily="2" charset="-122"/>
-              </a:rPr>
-              <a:t> </a:t>
-            </a:r>
-            <a:r>
-              <a:rPr lang="en-US" altLang="zh-CN" sz="1100" b="1" dirty="0">
-                <a:solidFill>
-                  <a:srgbClr val="000000"/>
-                </a:solidFill>
-                <a:effectLst/>
-                <a:latin typeface="Calibri" panose="020F0502020204030204" pitchFamily="34" charset="0"/>
-                <a:ea typeface="Calibri" panose="020F0502020204030204" pitchFamily="34" charset="0"/>
                 <a:cs typeface="Times New Roman" panose="02020603050405020304" pitchFamily="18" charset="0"/>
               </a:rPr>
-              <a:t>label-noise</a:t>
-            </a:r>
-            <a:r>
-              <a:rPr lang="en-US" altLang="zh-CN" sz="1100" b="1" spc="-85" dirty="0">
-                <a:effectLst/>
-                <a:latin typeface="Calibri" panose="020F0502020204030204" pitchFamily="34" charset="0"/>
-                <a:ea typeface="Calibri" panose="020F0502020204030204" pitchFamily="34" charset="0"/>
-                <a:cs typeface="Times New Roman" panose="02020603050405020304" pitchFamily="18" charset="0"/>
-              </a:rPr>
-              <a:t> </a:t>
-            </a:r>
-            <a:r>
-              <a:rPr lang="zh-CN" altLang="zh-CN" sz="1100" b="1" dirty="0">
+              <a:t>至今    西安电子科技大学浪潮俱乐部   技术部</a:t>
+            </a:r>
+            <a:r>
+              <a:rPr lang="en-US" altLang="zh-CN" sz="1100" b="1" dirty="0">
                 <a:solidFill>
                   <a:srgbClr val="000000"/>
                 </a:solidFill>
                 <a:effectLst/>
                 <a:latin typeface="Cambria" panose="02040503050406030204" pitchFamily="18" charset="0"/>
                 <a:ea typeface="宋体" panose="02010600030101010101" pitchFamily="2" charset="-122"/>
-                <a:cs typeface="宋体" panose="02010600030101010101" pitchFamily="2" charset="-122"/>
+                <a:cs typeface="Times New Roman" panose="02020603050405020304" pitchFamily="18" charset="0"/>
               </a:rPr>
-              <a:t>比赛，主要的任</a:t>
+              <a:t>AI</a:t>
+            </a:r>
+            <a:r>
+              <a:rPr lang="zh-CN" altLang="en-US" sz="1100" b="1" dirty="0">
+                <a:solidFill>
+                  <a:srgbClr val="000000"/>
+                </a:solidFill>
+                <a:effectLst/>
+                <a:latin typeface="Cambria" panose="02040503050406030204" pitchFamily="18" charset="0"/>
+                <a:ea typeface="宋体" panose="02010600030101010101" pitchFamily="2" charset="-122"/>
+                <a:cs typeface="Times New Roman" panose="02020603050405020304" pitchFamily="18" charset="0"/>
+              </a:rPr>
+              <a:t>组组长</a:t>
             </a:r>
             <a:endParaRPr lang="zh-CN" altLang="zh-CN" sz="1100" dirty="0">
               <a:effectLst/>
@@ -6405,826 +6357,10 @@
             </a:endParaRPr>
           </a:p>
           <a:p>
-            <a:pPr marL="918845"/>
-            <a:br>
-              <a:rPr lang="en-US" altLang="zh-CN" sz="1100" dirty="0">
-                <a:effectLst/>
-                <a:latin typeface="Cambria" panose="02040503050406030204" pitchFamily="18" charset="0"/>
-                <a:ea typeface="宋体" panose="02010600030101010101" pitchFamily="2" charset="-122"/>
-                <a:cs typeface="Times New Roman" panose="02020603050405020304" pitchFamily="18" charset="0"/>
-              </a:rPr>
-            </a:br>
-            <a:r>
-              <a:rPr lang="zh-CN" altLang="zh-CN" sz="1100" b="1" spc="-10" dirty="0">
-                <a:solidFill>
-                  <a:srgbClr val="000000"/>
-                </a:solidFill>
-                <a:effectLst/>
-                <a:latin typeface="Cambria" panose="02040503050406030204" pitchFamily="18" charset="0"/>
-                <a:ea typeface="宋体" panose="02010600030101010101" pitchFamily="2" charset="-122"/>
-                <a:cs typeface="宋体" panose="02010600030101010101" pitchFamily="2" charset="-122"/>
-              </a:rPr>
-              <a:t>务在科研上，以及下一届浪潮</a:t>
-            </a:r>
-            <a:r>
-              <a:rPr lang="zh-CN" altLang="zh-CN" sz="1100" b="1" spc="-10" dirty="0">
-                <a:effectLst/>
-                <a:latin typeface="Cambria" panose="02040503050406030204" pitchFamily="18" charset="0"/>
-                <a:ea typeface="宋体" panose="02010600030101010101" pitchFamily="2" charset="-122"/>
-                <a:cs typeface="宋体" panose="02010600030101010101" pitchFamily="2" charset="-122"/>
-              </a:rPr>
-              <a:t> </a:t>
-            </a:r>
-            <a:r>
-              <a:rPr lang="en-US" altLang="zh-CN" sz="1100" b="1" spc="-15" dirty="0">
-                <a:solidFill>
-                  <a:srgbClr val="000000"/>
-                </a:solidFill>
-                <a:effectLst/>
-                <a:latin typeface="Calibri" panose="020F0502020204030204" pitchFamily="34" charset="0"/>
-                <a:ea typeface="Calibri" panose="020F0502020204030204" pitchFamily="34" charset="0"/>
-                <a:cs typeface="Times New Roman" panose="02020603050405020304" pitchFamily="18" charset="0"/>
-              </a:rPr>
-              <a:t>AI</a:t>
-            </a:r>
-            <a:r>
-              <a:rPr lang="en-US" altLang="zh-CN" sz="1100" b="1" spc="-15" dirty="0">
-                <a:effectLst/>
-                <a:latin typeface="Calibri" panose="020F0502020204030204" pitchFamily="34" charset="0"/>
-                <a:ea typeface="Calibri" panose="020F0502020204030204" pitchFamily="34" charset="0"/>
-                <a:cs typeface="Times New Roman" panose="02020603050405020304" pitchFamily="18" charset="0"/>
-              </a:rPr>
-              <a:t> </a:t>
-            </a:r>
-            <a:r>
-              <a:rPr lang="zh-CN" altLang="zh-CN" sz="1100" b="1" spc="-15" dirty="0">
-                <a:solidFill>
-                  <a:srgbClr val="000000"/>
-                </a:solidFill>
-                <a:effectLst/>
-                <a:latin typeface="Cambria" panose="02040503050406030204" pitchFamily="18" charset="0"/>
-                <a:ea typeface="宋体" panose="02010600030101010101" pitchFamily="2" charset="-122"/>
-                <a:cs typeface="宋体" panose="02010600030101010101" pitchFamily="2" charset="-122"/>
-              </a:rPr>
-              <a:t>组</a:t>
-            </a:r>
-            <a:r>
-              <a:rPr lang="zh-CN" altLang="zh-CN" sz="1100" b="1" spc="-10" dirty="0">
-                <a:solidFill>
-                  <a:srgbClr val="000000"/>
-                </a:solidFill>
-                <a:effectLst/>
-                <a:latin typeface="Cambria" panose="02040503050406030204" pitchFamily="18" charset="0"/>
-                <a:ea typeface="宋体" panose="02010600030101010101" pitchFamily="2" charset="-122"/>
-                <a:cs typeface="宋体" panose="02010600030101010101" pitchFamily="2" charset="-122"/>
-              </a:rPr>
-              <a:t>学生的培养计划</a:t>
-            </a:r>
-            <a:endParaRPr lang="zh-CN" altLang="zh-CN" sz="1100" dirty="0">
-              <a:effectLst/>
-              <a:latin typeface="Cambria" panose="02040503050406030204" pitchFamily="18" charset="0"/>
-              <a:ea typeface="宋体" panose="02010600030101010101" pitchFamily="2" charset="-122"/>
-              <a:cs typeface="Times New Roman" panose="02020603050405020304" pitchFamily="18" charset="0"/>
-            </a:endParaRPr>
-          </a:p>
-          <a:p>
             <a:endParaRPr lang="zh-CN" altLang="en-US" sz="1100" b="1" dirty="0">
               <a:solidFill>
                 <a:srgbClr val="575757"/>
               </a:solidFill>
-              <a:latin typeface="Timess New Roman"/>
-            </a:endParaRPr>
-          </a:p>
-        </p:txBody>
-      </p:sp>
-      <p:sp>
-        <p:nvSpPr>
-          <p:cNvPr id="1025" name="文本框 1024">
-            <a:extLst>
-              <a:ext uri="{FF2B5EF4-FFF2-40B4-BE49-F238E27FC236}">
-                <a16:creationId xmlns:a16="http://schemas.microsoft.com/office/drawing/2014/main" id="{908A7C72-0E67-842C-C871-F689AA332F8F}"/>
-              </a:ext>
-            </a:extLst>
-          </p:cNvPr>
-          <p:cNvSpPr txBox="1"/>
-          <p:nvPr/>
-        </p:nvSpPr>
-        <p:spPr>
-          <a:xfrm>
-            <a:off x="-1084082" y="3397128"/>
-            <a:ext cx="9257121" cy="2094676"/>
-          </a:xfrm>
-          <a:prstGeom prst="rect">
-            <a:avLst/>
-          </a:prstGeom>
-          <a:noFill/>
-        </p:spPr>
-        <p:txBody>
-          <a:bodyPr wrap="square" rtlCol="0">
-            <a:spAutoFit/>
-          </a:bodyPr>
-          <a:lstStyle/>
-          <a:p>
-            <a:pPr marL="1761490"/>
-            <a:r>
-              <a:rPr lang="zh-CN" altLang="zh-CN" sz="1100" b="1" spc="-10" dirty="0">
-                <a:solidFill>
-                  <a:srgbClr val="575757"/>
-                </a:solidFill>
-                <a:effectLst/>
-                <a:latin typeface="Cambria" panose="02040503050406030204" pitchFamily="18" charset="0"/>
-                <a:ea typeface="宋体" panose="02010600030101010101" pitchFamily="2" charset="-122"/>
-                <a:cs typeface="宋体" panose="02010600030101010101" pitchFamily="2" charset="-122"/>
-              </a:rPr>
-              <a:t>语言</a:t>
-            </a:r>
-            <a:r>
-              <a:rPr lang="en-US" altLang="zh-CN" sz="1100" b="1" spc="-10" dirty="0">
-                <a:solidFill>
-                  <a:srgbClr val="575757"/>
-                </a:solidFill>
-                <a:effectLst/>
-                <a:latin typeface="Cambria" panose="02040503050406030204" pitchFamily="18" charset="0"/>
-                <a:ea typeface="宋体" panose="02010600030101010101" pitchFamily="2" charset="-122"/>
-                <a:cs typeface="宋体" panose="02010600030101010101" pitchFamily="2" charset="-122"/>
-              </a:rPr>
-              <a:t>:</a:t>
-            </a:r>
-            <a:r>
-              <a:rPr lang="en-US" altLang="zh-CN" sz="1100" b="1" spc="-280" dirty="0">
-                <a:effectLst/>
-                <a:latin typeface="宋体" panose="02010600030101010101" pitchFamily="2" charset="-122"/>
-                <a:ea typeface="宋体" panose="02010600030101010101" pitchFamily="2" charset="-122"/>
-                <a:cs typeface="宋体" panose="02010600030101010101" pitchFamily="2" charset="-122"/>
-              </a:rPr>
-              <a:t> </a:t>
-            </a:r>
-            <a:r>
-              <a:rPr lang="en-US" altLang="zh-CN" sz="1100" b="1" spc="-5" dirty="0">
-                <a:solidFill>
-                  <a:srgbClr val="575757"/>
-                </a:solidFill>
-                <a:effectLst/>
-                <a:latin typeface="宋体" panose="02010600030101010101" pitchFamily="2" charset="-122"/>
-                <a:ea typeface="宋体" panose="02010600030101010101" pitchFamily="2" charset="-122"/>
-                <a:cs typeface="宋体" panose="02010600030101010101" pitchFamily="2" charset="-122"/>
-              </a:rPr>
-              <a:t>python</a:t>
-            </a:r>
-            <a:endParaRPr lang="zh-CN" altLang="zh-CN" sz="1100" dirty="0">
-              <a:effectLst/>
-              <a:latin typeface="Cambria" panose="02040503050406030204" pitchFamily="18" charset="0"/>
-              <a:ea typeface="宋体" panose="02010600030101010101" pitchFamily="2" charset="-122"/>
-              <a:cs typeface="Times New Roman" panose="02020603050405020304" pitchFamily="18" charset="0"/>
-            </a:endParaRPr>
-          </a:p>
-          <a:p>
-            <a:pPr>
-              <a:lnSpc>
-                <a:spcPts val="1555"/>
-              </a:lnSpc>
-            </a:pPr>
-            <a:r>
-              <a:rPr lang="en-US" altLang="zh-CN" sz="1100" dirty="0">
-                <a:effectLst/>
-                <a:latin typeface="Cambria" panose="02040503050406030204" pitchFamily="18" charset="0"/>
-                <a:ea typeface="宋体" panose="02010600030101010101" pitchFamily="2" charset="-122"/>
-                <a:cs typeface="Times New Roman" panose="02020603050405020304" pitchFamily="18" charset="0"/>
-              </a:rPr>
-              <a:t> </a:t>
-            </a:r>
-            <a:endParaRPr lang="zh-CN" altLang="zh-CN" sz="1100" dirty="0">
-              <a:effectLst/>
-              <a:latin typeface="Cambria" panose="02040503050406030204" pitchFamily="18" charset="0"/>
-              <a:ea typeface="宋体" panose="02010600030101010101" pitchFamily="2" charset="-122"/>
-              <a:cs typeface="Times New Roman" panose="02020603050405020304" pitchFamily="18" charset="0"/>
-            </a:endParaRPr>
-          </a:p>
-          <a:p>
-            <a:pPr marL="2447925" marR="1798955" indent="-685800">
-              <a:lnSpc>
-                <a:spcPct val="200000"/>
-              </a:lnSpc>
-              <a:spcAft>
-                <a:spcPts val="0"/>
-              </a:spcAft>
-            </a:pPr>
-            <a:r>
-              <a:rPr lang="en-US" altLang="zh-CN" sz="1100" b="1" dirty="0">
-                <a:solidFill>
-                  <a:srgbClr val="575757"/>
-                </a:solidFill>
-                <a:effectLst/>
-                <a:latin typeface="宋体" panose="02010600030101010101" pitchFamily="2" charset="-122"/>
-                <a:ea typeface="宋体" panose="02010600030101010101" pitchFamily="2" charset="-122"/>
-                <a:cs typeface="宋体" panose="02010600030101010101" pitchFamily="2" charset="-122"/>
-              </a:rPr>
-              <a:t>A</a:t>
-            </a:r>
-            <a:r>
-              <a:rPr lang="en-US" altLang="zh-CN" sz="1100" b="1" spc="5" dirty="0">
-                <a:solidFill>
-                  <a:srgbClr val="575757"/>
-                </a:solidFill>
-                <a:effectLst/>
-                <a:latin typeface="宋体" panose="02010600030101010101" pitchFamily="2" charset="-122"/>
-                <a:ea typeface="宋体" panose="02010600030101010101" pitchFamily="2" charset="-122"/>
-                <a:cs typeface="宋体" panose="02010600030101010101" pitchFamily="2" charset="-122"/>
-              </a:rPr>
-              <a:t>I</a:t>
-            </a:r>
-            <a:r>
-              <a:rPr lang="en-US" altLang="zh-CN" sz="1100" b="1" spc="-305" dirty="0">
-                <a:effectLst/>
-                <a:latin typeface="宋体" panose="02010600030101010101" pitchFamily="2" charset="-122"/>
-                <a:ea typeface="宋体" panose="02010600030101010101" pitchFamily="2" charset="-122"/>
-                <a:cs typeface="宋体" panose="02010600030101010101" pitchFamily="2" charset="-122"/>
-              </a:rPr>
-              <a:t> </a:t>
-            </a:r>
-            <a:r>
-              <a:rPr lang="zh-CN" altLang="zh-CN" sz="1100" b="1" spc="5" dirty="0">
-                <a:solidFill>
-                  <a:srgbClr val="575757"/>
-                </a:solidFill>
-                <a:effectLst/>
-                <a:latin typeface="Cambria" panose="02040503050406030204" pitchFamily="18" charset="0"/>
-                <a:ea typeface="宋体" panose="02010600030101010101" pitchFamily="2" charset="-122"/>
-                <a:cs typeface="宋体" panose="02010600030101010101" pitchFamily="2" charset="-122"/>
-              </a:rPr>
-              <a:t>方向：了解各种基础的网络模型并能够用于训练，</a:t>
-            </a:r>
-            <a:r>
-              <a:rPr lang="en-US" altLang="zh-CN" sz="1100" b="1" spc="25" dirty="0" err="1">
-                <a:solidFill>
-                  <a:srgbClr val="575757"/>
-                </a:solidFill>
-                <a:effectLst/>
-                <a:latin typeface="宋体" panose="02010600030101010101" pitchFamily="2" charset="-122"/>
-                <a:ea typeface="宋体" panose="02010600030101010101" pitchFamily="2" charset="-122"/>
-                <a:cs typeface="宋体" panose="02010600030101010101" pitchFamily="2" charset="-122"/>
-              </a:rPr>
-              <a:t>C</a:t>
-            </a:r>
-            <a:r>
-              <a:rPr lang="en-US" altLang="zh-CN" sz="1100" b="1" dirty="0" err="1">
-                <a:solidFill>
-                  <a:srgbClr val="575757"/>
-                </a:solidFill>
-                <a:effectLst/>
-                <a:latin typeface="宋体" panose="02010600030101010101" pitchFamily="2" charset="-122"/>
-                <a:ea typeface="宋体" panose="02010600030101010101" pitchFamily="2" charset="-122"/>
-                <a:cs typeface="宋体" panose="02010600030101010101" pitchFamily="2" charset="-122"/>
-              </a:rPr>
-              <a:t>nn</a:t>
-            </a:r>
-            <a:r>
-              <a:rPr lang="zh-CN" altLang="zh-CN" sz="1100" b="1" spc="15" dirty="0">
-                <a:solidFill>
-                  <a:srgbClr val="575757"/>
-                </a:solidFill>
-                <a:effectLst/>
-                <a:latin typeface="Cambria" panose="02040503050406030204" pitchFamily="18" charset="0"/>
-                <a:ea typeface="宋体" panose="02010600030101010101" pitchFamily="2" charset="-122"/>
-                <a:cs typeface="宋体" panose="02010600030101010101" pitchFamily="2" charset="-122"/>
-              </a:rPr>
-              <a:t>，</a:t>
-            </a:r>
-            <a:r>
-              <a:rPr lang="en-US" altLang="zh-CN" sz="1100" b="1" spc="5" dirty="0" err="1">
-                <a:solidFill>
-                  <a:srgbClr val="575757"/>
-                </a:solidFill>
-                <a:effectLst/>
-                <a:latin typeface="宋体" panose="02010600030101010101" pitchFamily="2" charset="-122"/>
-                <a:ea typeface="宋体" panose="02010600030101010101" pitchFamily="2" charset="-122"/>
-                <a:cs typeface="宋体" panose="02010600030101010101" pitchFamily="2" charset="-122"/>
-              </a:rPr>
-              <a:t>Rnn</a:t>
-            </a:r>
-            <a:r>
-              <a:rPr lang="zh-CN" altLang="zh-CN" sz="1100" b="1" spc="20" dirty="0">
-                <a:solidFill>
-                  <a:srgbClr val="575757"/>
-                </a:solidFill>
-                <a:effectLst/>
-                <a:latin typeface="Cambria" panose="02040503050406030204" pitchFamily="18" charset="0"/>
-                <a:ea typeface="宋体" panose="02010600030101010101" pitchFamily="2" charset="-122"/>
-                <a:cs typeface="宋体" panose="02010600030101010101" pitchFamily="2" charset="-122"/>
-              </a:rPr>
-              <a:t>，</a:t>
-            </a:r>
-            <a:r>
-              <a:rPr lang="en-US" altLang="zh-CN" sz="1100" b="1" spc="10" dirty="0">
-                <a:solidFill>
-                  <a:srgbClr val="575757"/>
-                </a:solidFill>
-                <a:effectLst/>
-                <a:latin typeface="宋体" panose="02010600030101010101" pitchFamily="2" charset="-122"/>
-                <a:ea typeface="宋体" panose="02010600030101010101" pitchFamily="2" charset="-122"/>
-                <a:cs typeface="宋体" panose="02010600030101010101" pitchFamily="2" charset="-122"/>
-              </a:rPr>
-              <a:t>T</a:t>
-            </a:r>
-            <a:r>
-              <a:rPr lang="en-US" altLang="zh-CN" sz="1100" b="1" spc="5" dirty="0">
-                <a:solidFill>
-                  <a:srgbClr val="575757"/>
-                </a:solidFill>
-                <a:effectLst/>
-                <a:latin typeface="宋体" panose="02010600030101010101" pitchFamily="2" charset="-122"/>
-                <a:ea typeface="宋体" panose="02010600030101010101" pitchFamily="2" charset="-122"/>
-                <a:cs typeface="宋体" panose="02010600030101010101" pitchFamily="2" charset="-122"/>
-              </a:rPr>
-              <a:t>ransformer</a:t>
-            </a:r>
-            <a:r>
-              <a:rPr lang="zh-CN" altLang="zh-CN" sz="1100" b="1" spc="20" dirty="0">
-                <a:solidFill>
-                  <a:srgbClr val="575757"/>
-                </a:solidFill>
-                <a:effectLst/>
-                <a:latin typeface="Cambria" panose="02040503050406030204" pitchFamily="18" charset="0"/>
-                <a:ea typeface="宋体" panose="02010600030101010101" pitchFamily="2" charset="-122"/>
-                <a:cs typeface="宋体" panose="02010600030101010101" pitchFamily="2" charset="-122"/>
-              </a:rPr>
-              <a:t>，以及其他深度学习</a:t>
-            </a:r>
-            <a:r>
-              <a:rPr lang="zh-CN" altLang="zh-CN" sz="1100" b="1" spc="15" dirty="0">
-                <a:solidFill>
-                  <a:srgbClr val="575757"/>
-                </a:solidFill>
-                <a:effectLst/>
-                <a:latin typeface="Cambria" panose="02040503050406030204" pitchFamily="18" charset="0"/>
-                <a:ea typeface="宋体" panose="02010600030101010101" pitchFamily="2" charset="-122"/>
-                <a:cs typeface="宋体" panose="02010600030101010101" pitchFamily="2" charset="-122"/>
-              </a:rPr>
-              <a:t>和机器学</a:t>
-            </a:r>
-            <a:r>
-              <a:rPr lang="zh-CN" altLang="zh-CN" sz="1100" b="1" spc="-20" dirty="0">
-                <a:solidFill>
-                  <a:srgbClr val="575757"/>
-                </a:solidFill>
-                <a:effectLst/>
-                <a:latin typeface="Cambria" panose="02040503050406030204" pitchFamily="18" charset="0"/>
-                <a:ea typeface="宋体" panose="02010600030101010101" pitchFamily="2" charset="-122"/>
-                <a:cs typeface="宋体" panose="02010600030101010101" pitchFamily="2" charset="-122"/>
-              </a:rPr>
-              <a:t>习知识，以及能够使用</a:t>
-            </a:r>
-            <a:r>
-              <a:rPr lang="zh-CN" altLang="zh-CN" sz="1100" b="1" spc="-10" dirty="0">
-                <a:effectLst/>
-                <a:latin typeface="Cambria" panose="02040503050406030204" pitchFamily="18" charset="0"/>
-                <a:ea typeface="宋体" panose="02010600030101010101" pitchFamily="2" charset="-122"/>
-                <a:cs typeface="宋体" panose="02010600030101010101" pitchFamily="2" charset="-122"/>
-              </a:rPr>
-              <a:t> </a:t>
-            </a:r>
-            <a:r>
-              <a:rPr lang="en-US" altLang="zh-CN" sz="1100" b="1" spc="-15" dirty="0">
-                <a:solidFill>
-                  <a:srgbClr val="575757"/>
-                </a:solidFill>
-                <a:effectLst/>
-                <a:latin typeface="宋体" panose="02010600030101010101" pitchFamily="2" charset="-122"/>
-                <a:ea typeface="宋体" panose="02010600030101010101" pitchFamily="2" charset="-122"/>
-                <a:cs typeface="宋体" panose="02010600030101010101" pitchFamily="2" charset="-122"/>
-              </a:rPr>
-              <a:t>python</a:t>
-            </a:r>
-            <a:r>
-              <a:rPr lang="en-US" altLang="zh-CN" sz="1100" b="1" spc="-20" dirty="0">
-                <a:effectLst/>
-                <a:latin typeface="宋体" panose="02010600030101010101" pitchFamily="2" charset="-122"/>
-                <a:ea typeface="宋体" panose="02010600030101010101" pitchFamily="2" charset="-122"/>
-                <a:cs typeface="宋体" panose="02010600030101010101" pitchFamily="2" charset="-122"/>
-              </a:rPr>
-              <a:t> </a:t>
-            </a:r>
-            <a:r>
-              <a:rPr lang="zh-CN" altLang="zh-CN" sz="1100" b="1" spc="-15" dirty="0">
-                <a:solidFill>
-                  <a:srgbClr val="575757"/>
-                </a:solidFill>
-                <a:effectLst/>
-                <a:latin typeface="Cambria" panose="02040503050406030204" pitchFamily="18" charset="0"/>
-                <a:ea typeface="宋体" panose="02010600030101010101" pitchFamily="2" charset="-122"/>
-                <a:cs typeface="宋体" panose="02010600030101010101" pitchFamily="2" charset="-122"/>
-              </a:rPr>
-              <a:t>相关</a:t>
-            </a:r>
-            <a:r>
-              <a:rPr lang="zh-CN" altLang="zh-CN" sz="1100" b="1" spc="-20" dirty="0">
-                <a:solidFill>
-                  <a:srgbClr val="575757"/>
-                </a:solidFill>
-                <a:effectLst/>
-                <a:latin typeface="Cambria" panose="02040503050406030204" pitchFamily="18" charset="0"/>
-                <a:ea typeface="宋体" panose="02010600030101010101" pitchFamily="2" charset="-122"/>
-                <a:cs typeface="宋体" panose="02010600030101010101" pitchFamily="2" charset="-122"/>
-              </a:rPr>
-              <a:t>库进行编程实</a:t>
-            </a:r>
-            <a:r>
-              <a:rPr lang="zh-CN" altLang="zh-CN" sz="1100" b="1" spc="-15" dirty="0">
-                <a:solidFill>
-                  <a:srgbClr val="575757"/>
-                </a:solidFill>
-                <a:effectLst/>
-                <a:latin typeface="Cambria" panose="02040503050406030204" pitchFamily="18" charset="0"/>
-                <a:ea typeface="宋体" panose="02010600030101010101" pitchFamily="2" charset="-122"/>
-                <a:cs typeface="宋体" panose="02010600030101010101" pitchFamily="2" charset="-122"/>
-              </a:rPr>
-              <a:t>现</a:t>
-            </a:r>
-            <a:endParaRPr lang="zh-CN" altLang="zh-CN" sz="1100" dirty="0">
-              <a:effectLst/>
-              <a:latin typeface="Cambria" panose="02040503050406030204" pitchFamily="18" charset="0"/>
-              <a:ea typeface="宋体" panose="02010600030101010101" pitchFamily="2" charset="-122"/>
-              <a:cs typeface="Times New Roman" panose="02020603050405020304" pitchFamily="18" charset="0"/>
-            </a:endParaRPr>
-          </a:p>
-          <a:p>
-            <a:pPr marL="2447925" marR="1894840" indent="-685800">
-              <a:lnSpc>
-                <a:spcPct val="199000"/>
-              </a:lnSpc>
-              <a:spcAft>
-                <a:spcPts val="0"/>
-              </a:spcAft>
-            </a:pPr>
-            <a:r>
-              <a:rPr lang="en-US" altLang="zh-CN" sz="1100" b="1" spc="-85" dirty="0" err="1">
-                <a:solidFill>
-                  <a:srgbClr val="575757"/>
-                </a:solidFill>
-                <a:effectLst/>
-                <a:latin typeface="宋体" panose="02010600030101010101" pitchFamily="2" charset="-122"/>
-                <a:ea typeface="宋体" panose="02010600030101010101" pitchFamily="2" charset="-122"/>
-                <a:cs typeface="宋体" panose="02010600030101010101" pitchFamily="2" charset="-122"/>
-              </a:rPr>
-              <a:t>关于这个项目：</a:t>
-            </a:r>
-            <a:r>
-              <a:rPr lang="en-US" altLang="zh-CN" sz="1100" b="1" spc="-95" dirty="0" err="1">
-                <a:solidFill>
-                  <a:srgbClr val="575757"/>
-                </a:solidFill>
-                <a:effectLst/>
-                <a:latin typeface="宋体" panose="02010600030101010101" pitchFamily="2" charset="-122"/>
-                <a:ea typeface="宋体" panose="02010600030101010101" pitchFamily="2" charset="-122"/>
-                <a:cs typeface="宋体" panose="02010600030101010101" pitchFamily="2" charset="-122"/>
-              </a:rPr>
-              <a:t>进行</a:t>
-            </a:r>
-            <a:r>
-              <a:rPr lang="en-US" altLang="zh-CN" sz="1100" b="1" spc="-85" dirty="0" err="1">
-                <a:solidFill>
-                  <a:srgbClr val="575757"/>
-                </a:solidFill>
-                <a:effectLst/>
-                <a:latin typeface="宋体" panose="02010600030101010101" pitchFamily="2" charset="-122"/>
-                <a:ea typeface="宋体" panose="02010600030101010101" pitchFamily="2" charset="-122"/>
-                <a:cs typeface="宋体" panose="02010600030101010101" pitchFamily="2" charset="-122"/>
-              </a:rPr>
-              <a:t>过</a:t>
-            </a:r>
-            <a:r>
-              <a:rPr lang="en-US" altLang="zh-CN" sz="1100" b="1" spc="-40" dirty="0">
-                <a:effectLst/>
-                <a:latin typeface="宋体" panose="02010600030101010101" pitchFamily="2" charset="-122"/>
-                <a:ea typeface="宋体" panose="02010600030101010101" pitchFamily="2" charset="-122"/>
-                <a:cs typeface="宋体" panose="02010600030101010101" pitchFamily="2" charset="-122"/>
-              </a:rPr>
-              <a:t> </a:t>
-            </a:r>
-            <a:r>
-              <a:rPr lang="en-US" altLang="zh-CN" sz="1100" b="1" spc="-45" dirty="0">
-                <a:solidFill>
-                  <a:srgbClr val="575757"/>
-                </a:solidFill>
-                <a:effectLst/>
-                <a:latin typeface="宋体" panose="02010600030101010101" pitchFamily="2" charset="-122"/>
-                <a:ea typeface="宋体" panose="02010600030101010101" pitchFamily="2" charset="-122"/>
-                <a:cs typeface="宋体" panose="02010600030101010101" pitchFamily="2" charset="-122"/>
-              </a:rPr>
-              <a:t>image</a:t>
-            </a:r>
-            <a:r>
-              <a:rPr lang="en-US" altLang="zh-CN" sz="1100" b="1" spc="-45" dirty="0">
-                <a:effectLst/>
-                <a:latin typeface="宋体" panose="02010600030101010101" pitchFamily="2" charset="-122"/>
-                <a:ea typeface="宋体" panose="02010600030101010101" pitchFamily="2" charset="-122"/>
-                <a:cs typeface="宋体" panose="02010600030101010101" pitchFamily="2" charset="-122"/>
-              </a:rPr>
-              <a:t> </a:t>
-            </a:r>
-            <a:r>
-              <a:rPr lang="en-US" altLang="zh-CN" sz="1100" b="1" spc="-45" dirty="0">
-                <a:solidFill>
-                  <a:srgbClr val="575757"/>
-                </a:solidFill>
-                <a:effectLst/>
-                <a:latin typeface="宋体" panose="02010600030101010101" pitchFamily="2" charset="-122"/>
-                <a:ea typeface="宋体" panose="02010600030101010101" pitchFamily="2" charset="-122"/>
-                <a:cs typeface="宋体" panose="02010600030101010101" pitchFamily="2" charset="-122"/>
-              </a:rPr>
-              <a:t>classification</a:t>
-            </a:r>
-            <a:r>
-              <a:rPr lang="en-US" altLang="zh-CN" sz="1100" b="1" spc="-40" dirty="0">
-                <a:effectLst/>
-                <a:latin typeface="宋体" panose="02010600030101010101" pitchFamily="2" charset="-122"/>
-                <a:ea typeface="宋体" panose="02010600030101010101" pitchFamily="2" charset="-122"/>
-                <a:cs typeface="宋体" panose="02010600030101010101" pitchFamily="2" charset="-122"/>
-              </a:rPr>
-              <a:t> </a:t>
-            </a:r>
-            <a:r>
-              <a:rPr lang="en-US" altLang="zh-CN" sz="1100" b="1" spc="-60" dirty="0">
-                <a:solidFill>
-                  <a:srgbClr val="575757"/>
-                </a:solidFill>
-                <a:effectLst/>
-                <a:latin typeface="宋体" panose="02010600030101010101" pitchFamily="2" charset="-122"/>
-                <a:ea typeface="宋体" panose="02010600030101010101" pitchFamily="2" charset="-122"/>
-                <a:cs typeface="宋体" panose="02010600030101010101" pitchFamily="2" charset="-122"/>
-              </a:rPr>
-              <a:t>和</a:t>
-            </a:r>
-            <a:r>
-              <a:rPr lang="en-US" altLang="zh-CN" sz="1100" b="1" spc="-50" dirty="0">
-                <a:effectLst/>
-                <a:latin typeface="宋体" panose="02010600030101010101" pitchFamily="2" charset="-122"/>
-                <a:ea typeface="宋体" panose="02010600030101010101" pitchFamily="2" charset="-122"/>
-                <a:cs typeface="宋体" panose="02010600030101010101" pitchFamily="2" charset="-122"/>
-              </a:rPr>
-              <a:t> </a:t>
-            </a:r>
-            <a:r>
-              <a:rPr lang="en-US" altLang="zh-CN" sz="1100" b="1" spc="-85" dirty="0">
-                <a:solidFill>
-                  <a:srgbClr val="575757"/>
-                </a:solidFill>
-                <a:effectLst/>
-                <a:latin typeface="宋体" panose="02010600030101010101" pitchFamily="2" charset="-122"/>
-                <a:ea typeface="宋体" panose="02010600030101010101" pitchFamily="2" charset="-122"/>
-                <a:cs typeface="宋体" panose="02010600030101010101" pitchFamily="2" charset="-122"/>
-              </a:rPr>
-              <a:t>图片</a:t>
-            </a:r>
-            <a:r>
-              <a:rPr lang="en-US" altLang="zh-CN" sz="1100" b="1" spc="-90" dirty="0">
-                <a:solidFill>
-                  <a:srgbClr val="575757"/>
-                </a:solidFill>
-                <a:effectLst/>
-                <a:latin typeface="宋体" panose="02010600030101010101" pitchFamily="2" charset="-122"/>
-                <a:ea typeface="宋体" panose="02010600030101010101" pitchFamily="2" charset="-122"/>
-                <a:cs typeface="宋体" panose="02010600030101010101" pitchFamily="2" charset="-122"/>
-              </a:rPr>
-              <a:t>数据</a:t>
-            </a:r>
-            <a:r>
-              <a:rPr lang="en-US" altLang="zh-CN" sz="1100" b="1" spc="-65" dirty="0">
-                <a:solidFill>
-                  <a:srgbClr val="575757"/>
-                </a:solidFill>
-                <a:effectLst/>
-                <a:latin typeface="宋体" panose="02010600030101010101" pitchFamily="2" charset="-122"/>
-                <a:ea typeface="宋体" panose="02010600030101010101" pitchFamily="2" charset="-122"/>
-                <a:cs typeface="宋体" panose="02010600030101010101" pitchFamily="2" charset="-122"/>
-              </a:rPr>
-              <a:t>cifar</a:t>
-            </a:r>
-            <a:r>
-              <a:rPr lang="en-US" altLang="zh-CN" sz="1100" b="1" spc="-70" dirty="0">
-                <a:solidFill>
-                  <a:srgbClr val="575757"/>
-                </a:solidFill>
-                <a:effectLst/>
-                <a:latin typeface="宋体" panose="02010600030101010101" pitchFamily="2" charset="-122"/>
-                <a:ea typeface="宋体" panose="02010600030101010101" pitchFamily="2" charset="-122"/>
-                <a:cs typeface="宋体" panose="02010600030101010101" pitchFamily="2" charset="-122"/>
-              </a:rPr>
-              <a:t>10</a:t>
-            </a:r>
-            <a:r>
-              <a:rPr lang="en-US" altLang="zh-CN" sz="1100" b="1" spc="-65" dirty="0">
-                <a:effectLst/>
-                <a:latin typeface="宋体" panose="02010600030101010101" pitchFamily="2" charset="-122"/>
-                <a:ea typeface="宋体" panose="02010600030101010101" pitchFamily="2" charset="-122"/>
-                <a:cs typeface="宋体" panose="02010600030101010101" pitchFamily="2" charset="-122"/>
-              </a:rPr>
-              <a:t> </a:t>
-            </a:r>
-            <a:r>
-              <a:rPr lang="en-US" altLang="zh-CN" sz="1100" b="1" spc="-65" dirty="0">
-                <a:solidFill>
-                  <a:srgbClr val="575757"/>
-                </a:solidFill>
-                <a:effectLst/>
-                <a:latin typeface="宋体" panose="02010600030101010101" pitchFamily="2" charset="-122"/>
-                <a:ea typeface="宋体" panose="02010600030101010101" pitchFamily="2" charset="-122"/>
-                <a:cs typeface="宋体" panose="02010600030101010101" pitchFamily="2" charset="-122"/>
-              </a:rPr>
-              <a:t>&amp;</a:t>
-            </a:r>
-            <a:r>
-              <a:rPr lang="en-US" altLang="zh-CN" sz="1100" b="1" spc="-65" dirty="0">
-                <a:effectLst/>
-                <a:latin typeface="宋体" panose="02010600030101010101" pitchFamily="2" charset="-122"/>
-                <a:ea typeface="宋体" panose="02010600030101010101" pitchFamily="2" charset="-122"/>
-                <a:cs typeface="宋体" panose="02010600030101010101" pitchFamily="2" charset="-122"/>
-              </a:rPr>
-              <a:t> </a:t>
-            </a:r>
-            <a:r>
-              <a:rPr lang="en-US" altLang="zh-CN" sz="1100" b="1" spc="-65" dirty="0">
-                <a:solidFill>
-                  <a:srgbClr val="575757"/>
-                </a:solidFill>
-                <a:effectLst/>
-                <a:latin typeface="宋体" panose="02010600030101010101" pitchFamily="2" charset="-122"/>
-                <a:ea typeface="宋体" panose="02010600030101010101" pitchFamily="2" charset="-122"/>
-                <a:cs typeface="宋体" panose="02010600030101010101" pitchFamily="2" charset="-122"/>
-              </a:rPr>
-              <a:t>cifar100</a:t>
-            </a:r>
-            <a:r>
-              <a:rPr lang="en-US" altLang="zh-CN" sz="1100" b="1" spc="-65" dirty="0">
-                <a:effectLst/>
-                <a:latin typeface="宋体" panose="02010600030101010101" pitchFamily="2" charset="-122"/>
-                <a:ea typeface="宋体" panose="02010600030101010101" pitchFamily="2" charset="-122"/>
-                <a:cs typeface="宋体" panose="02010600030101010101" pitchFamily="2" charset="-122"/>
-              </a:rPr>
-              <a:t> </a:t>
-            </a:r>
-            <a:r>
-              <a:rPr lang="en-US" altLang="zh-CN" sz="1100" b="1" spc="-140" dirty="0">
-                <a:solidFill>
-                  <a:srgbClr val="575757"/>
-                </a:solidFill>
-                <a:effectLst/>
-                <a:latin typeface="宋体" panose="02010600030101010101" pitchFamily="2" charset="-122"/>
-                <a:ea typeface="宋体" panose="02010600030101010101" pitchFamily="2" charset="-122"/>
-                <a:cs typeface="宋体" panose="02010600030101010101" pitchFamily="2" charset="-122"/>
-              </a:rPr>
-              <a:t>的</a:t>
-            </a:r>
-            <a:r>
-              <a:rPr lang="en-US" altLang="zh-CN" sz="1100" b="1" spc="-65" dirty="0">
-                <a:effectLst/>
-                <a:latin typeface="宋体" panose="02010600030101010101" pitchFamily="2" charset="-122"/>
-                <a:ea typeface="宋体" panose="02010600030101010101" pitchFamily="2" charset="-122"/>
-                <a:cs typeface="宋体" panose="02010600030101010101" pitchFamily="2" charset="-122"/>
-              </a:rPr>
-              <a:t> </a:t>
-            </a:r>
-            <a:r>
-              <a:rPr lang="en-US" altLang="zh-CN" sz="1100" b="1" spc="-65" dirty="0">
-                <a:solidFill>
-                  <a:srgbClr val="575757"/>
-                </a:solidFill>
-                <a:effectLst/>
-                <a:latin typeface="宋体" panose="02010600030101010101" pitchFamily="2" charset="-122"/>
-                <a:ea typeface="宋体" panose="02010600030101010101" pitchFamily="2" charset="-122"/>
-                <a:cs typeface="宋体" panose="02010600030101010101" pitchFamily="2" charset="-122"/>
-              </a:rPr>
-              <a:t>label</a:t>
-            </a:r>
-            <a:r>
-              <a:rPr lang="en-US" altLang="zh-CN" sz="1100" b="1" spc="-70" dirty="0">
-                <a:effectLst/>
-                <a:latin typeface="宋体" panose="02010600030101010101" pitchFamily="2" charset="-122"/>
-                <a:ea typeface="宋体" panose="02010600030101010101" pitchFamily="2" charset="-122"/>
-                <a:cs typeface="宋体" panose="02010600030101010101" pitchFamily="2" charset="-122"/>
-              </a:rPr>
-              <a:t> </a:t>
-            </a:r>
-            <a:r>
-              <a:rPr lang="en-US" altLang="zh-CN" sz="1100" b="1" spc="-65" dirty="0">
-                <a:solidFill>
-                  <a:srgbClr val="575757"/>
-                </a:solidFill>
-                <a:effectLst/>
-                <a:latin typeface="宋体" panose="02010600030101010101" pitchFamily="2" charset="-122"/>
-                <a:ea typeface="宋体" panose="02010600030101010101" pitchFamily="2" charset="-122"/>
-                <a:cs typeface="宋体" panose="02010600030101010101" pitchFamily="2" charset="-122"/>
-              </a:rPr>
-              <a:t>noise</a:t>
-            </a:r>
-            <a:r>
-              <a:rPr lang="en-US" altLang="zh-CN" sz="1100" b="1" spc="-70" dirty="0">
-                <a:effectLst/>
-                <a:latin typeface="宋体" panose="02010600030101010101" pitchFamily="2" charset="-122"/>
-                <a:ea typeface="宋体" panose="02010600030101010101" pitchFamily="2" charset="-122"/>
-                <a:cs typeface="宋体" panose="02010600030101010101" pitchFamily="2" charset="-122"/>
-              </a:rPr>
-              <a:t> </a:t>
-            </a:r>
-            <a:r>
-              <a:rPr lang="en-US" altLang="zh-CN" sz="1100" b="1" spc="-65" dirty="0" err="1">
-                <a:solidFill>
-                  <a:srgbClr val="575757"/>
-                </a:solidFill>
-                <a:effectLst/>
-                <a:latin typeface="宋体" panose="02010600030101010101" pitchFamily="2" charset="-122"/>
-                <a:ea typeface="宋体" panose="02010600030101010101" pitchFamily="2" charset="-122"/>
-                <a:cs typeface="宋体" panose="02010600030101010101" pitchFamily="2" charset="-122"/>
-              </a:rPr>
-              <a:t>detection</a:t>
-            </a:r>
-            <a:r>
-              <a:rPr lang="en-US" altLang="zh-CN" sz="1100" b="1" spc="-155" dirty="0" err="1">
-                <a:solidFill>
-                  <a:srgbClr val="575757"/>
-                </a:solidFill>
-                <a:effectLst/>
-                <a:latin typeface="宋体" panose="02010600030101010101" pitchFamily="2" charset="-122"/>
-                <a:ea typeface="宋体" panose="02010600030101010101" pitchFamily="2" charset="-122"/>
-                <a:cs typeface="宋体" panose="02010600030101010101" pitchFamily="2" charset="-122"/>
-              </a:rPr>
-              <a:t>，</a:t>
-            </a:r>
-            <a:r>
-              <a:rPr lang="en-US" altLang="zh-CN" sz="1100" b="1" spc="-130" dirty="0" err="1">
-                <a:solidFill>
-                  <a:srgbClr val="575757"/>
-                </a:solidFill>
-                <a:effectLst/>
-                <a:latin typeface="宋体" panose="02010600030101010101" pitchFamily="2" charset="-122"/>
-                <a:ea typeface="宋体" panose="02010600030101010101" pitchFamily="2" charset="-122"/>
-                <a:cs typeface="宋体" panose="02010600030101010101" pitchFamily="2" charset="-122"/>
-              </a:rPr>
-              <a:t>能</a:t>
-            </a:r>
-            <a:r>
-              <a:rPr lang="en-US" altLang="zh-CN" sz="1100" b="1" dirty="0" err="1">
-                <a:solidFill>
-                  <a:srgbClr val="575757"/>
-                </a:solidFill>
-                <a:effectLst/>
-                <a:latin typeface="宋体" panose="02010600030101010101" pitchFamily="2" charset="-122"/>
-                <a:ea typeface="宋体" panose="02010600030101010101" pitchFamily="2" charset="-122"/>
-                <a:cs typeface="宋体" panose="02010600030101010101" pitchFamily="2" charset="-122"/>
-              </a:rPr>
-              <a:t>够使用</a:t>
-            </a:r>
-            <a:r>
-              <a:rPr lang="en-US" altLang="zh-CN" sz="1100" b="1" dirty="0">
-                <a:effectLst/>
-                <a:latin typeface="宋体" panose="02010600030101010101" pitchFamily="2" charset="-122"/>
-                <a:ea typeface="宋体" panose="02010600030101010101" pitchFamily="2" charset="-122"/>
-                <a:cs typeface="宋体" panose="02010600030101010101" pitchFamily="2" charset="-122"/>
-              </a:rPr>
-              <a:t> </a:t>
-            </a:r>
-            <a:r>
-              <a:rPr lang="en-US" altLang="zh-CN" sz="1100" b="1" dirty="0" err="1">
-                <a:solidFill>
-                  <a:srgbClr val="575757"/>
-                </a:solidFill>
-                <a:effectLst/>
-                <a:latin typeface="宋体" panose="02010600030101010101" pitchFamily="2" charset="-122"/>
-                <a:ea typeface="宋体" panose="02010600030101010101" pitchFamily="2" charset="-122"/>
-                <a:cs typeface="宋体" panose="02010600030101010101" pitchFamily="2" charset="-122"/>
-              </a:rPr>
-              <a:t>ViT，CNN</a:t>
-            </a:r>
-            <a:r>
-              <a:rPr lang="en-US" altLang="zh-CN" sz="1100" b="1" spc="-45" dirty="0">
-                <a:effectLst/>
-                <a:latin typeface="宋体" panose="02010600030101010101" pitchFamily="2" charset="-122"/>
-                <a:ea typeface="宋体" panose="02010600030101010101" pitchFamily="2" charset="-122"/>
-                <a:cs typeface="宋体" panose="02010600030101010101" pitchFamily="2" charset="-122"/>
-              </a:rPr>
-              <a:t> </a:t>
-            </a:r>
-            <a:r>
-              <a:rPr lang="en-US" altLang="zh-CN" sz="1100" b="1" dirty="0" err="1">
-                <a:solidFill>
-                  <a:srgbClr val="575757"/>
-                </a:solidFill>
-                <a:effectLst/>
-                <a:latin typeface="宋体" panose="02010600030101010101" pitchFamily="2" charset="-122"/>
-                <a:ea typeface="宋体" panose="02010600030101010101" pitchFamily="2" charset="-122"/>
-                <a:cs typeface="宋体" panose="02010600030101010101" pitchFamily="2" charset="-122"/>
-              </a:rPr>
-              <a:t>以及其改进模型进行项目推动</a:t>
-            </a:r>
-            <a:endParaRPr lang="zh-CN" altLang="zh-CN" sz="1100" dirty="0">
-              <a:effectLst/>
-              <a:latin typeface="Cambria" panose="02040503050406030204" pitchFamily="18" charset="0"/>
-              <a:ea typeface="宋体" panose="02010600030101010101" pitchFamily="2" charset="-122"/>
-              <a:cs typeface="Times New Roman" panose="02020603050405020304" pitchFamily="18" charset="0"/>
-            </a:endParaRPr>
-          </a:p>
-          <a:p>
-            <a:endParaRPr lang="zh-CN" altLang="en-US" dirty="0">
               <a:latin typeface="Timess New Roman"/>
             </a:endParaRPr>
           </a:p>
@@ -7269,932 +6405,6 @@
       </p:sp>
       <p:sp>
         <p:nvSpPr>
-          <p:cNvPr id="150" name="文本框 149">
-            <a:extLst>
-              <a:ext uri="{FF2B5EF4-FFF2-40B4-BE49-F238E27FC236}">
-                <a16:creationId xmlns:a16="http://schemas.microsoft.com/office/drawing/2014/main" id="{2F0BB76F-2AFE-F8E6-EC03-967C00DD09DF}"/>
-              </a:ext>
-            </a:extLst>
-          </p:cNvPr>
-          <p:cNvSpPr txBox="1"/>
-          <p:nvPr/>
-        </p:nvSpPr>
-        <p:spPr>
-          <a:xfrm>
-            <a:off x="-259946" y="5662183"/>
-            <a:ext cx="6891922" cy="2341667"/>
-          </a:xfrm>
-          <a:prstGeom prst="rect">
-            <a:avLst/>
-          </a:prstGeom>
-          <a:noFill/>
-        </p:spPr>
-        <p:txBody>
-          <a:bodyPr wrap="square" rtlCol="0">
-            <a:spAutoFit/>
-          </a:bodyPr>
-          <a:lstStyle/>
-          <a:p>
-            <a:pPr>
-              <a:lnSpc>
-                <a:spcPts val="1670"/>
-              </a:lnSpc>
-            </a:pPr>
-            <a:r>
-              <a:rPr lang="en-US" altLang="zh-CN" sz="1800" dirty="0">
-                <a:effectLst/>
-                <a:latin typeface="Cambria" panose="02040503050406030204" pitchFamily="18" charset="0"/>
-                <a:ea typeface="宋体" panose="02010600030101010101" pitchFamily="2" charset="-122"/>
-                <a:cs typeface="Times New Roman" panose="02020603050405020304" pitchFamily="18" charset="0"/>
-              </a:rPr>
-              <a:t> </a:t>
-            </a:r>
-            <a:endParaRPr lang="zh-CN" altLang="zh-CN" sz="1100" dirty="0">
-              <a:effectLst/>
-              <a:latin typeface="Cambria" panose="02040503050406030204" pitchFamily="18" charset="0"/>
-              <a:ea typeface="宋体" panose="02010600030101010101" pitchFamily="2" charset="-122"/>
-              <a:cs typeface="Times New Roman" panose="02020603050405020304" pitchFamily="18" charset="0"/>
-            </a:endParaRPr>
-          </a:p>
-          <a:p>
-            <a:pPr marL="883920"/>
-            <a:r>
-              <a:rPr lang="en-US" altLang="zh-CN" sz="1100" b="1" spc="-10" dirty="0" err="1">
-                <a:solidFill>
-                  <a:srgbClr val="000000"/>
-                </a:solidFill>
-                <a:effectLst/>
-                <a:latin typeface="宋体" panose="02010600030101010101" pitchFamily="2" charset="-122"/>
-                <a:ea typeface="宋体" panose="02010600030101010101" pitchFamily="2" charset="-122"/>
-                <a:cs typeface="宋体" panose="02010600030101010101" pitchFamily="2" charset="-122"/>
-              </a:rPr>
-              <a:t>比赛</a:t>
-            </a:r>
-            <a:r>
-              <a:rPr lang="en-US" altLang="zh-CN" sz="1100" b="1" spc="-10" dirty="0">
-                <a:solidFill>
-                  <a:srgbClr val="000000"/>
-                </a:solidFill>
-                <a:effectLst/>
-                <a:latin typeface="宋体" panose="02010600030101010101" pitchFamily="2" charset="-122"/>
-                <a:ea typeface="宋体" panose="02010600030101010101" pitchFamily="2" charset="-122"/>
-                <a:cs typeface="宋体" panose="02010600030101010101" pitchFamily="2" charset="-122"/>
-              </a:rPr>
-              <a:t>：</a:t>
-            </a:r>
-            <a:endParaRPr lang="en-US" altLang="zh-CN" sz="1100" spc="-10" dirty="0">
-              <a:latin typeface="Cambria" panose="02040503050406030204" pitchFamily="18" charset="0"/>
-              <a:ea typeface="宋体" panose="02010600030101010101" pitchFamily="2" charset="-122"/>
-              <a:cs typeface="Times New Roman" panose="02020603050405020304" pitchFamily="18" charset="0"/>
-            </a:endParaRPr>
-          </a:p>
-          <a:p>
-            <a:pPr marL="883920"/>
-            <a:r>
-              <a:rPr lang="en-US" altLang="zh-CN" sz="1100" b="1" spc="-10" dirty="0">
-                <a:solidFill>
-                  <a:srgbClr val="000000"/>
-                </a:solidFill>
-                <a:effectLst/>
-                <a:latin typeface="Cambria" panose="02040503050406030204" pitchFamily="18" charset="0"/>
-                <a:ea typeface="宋体" panose="02010600030101010101" pitchFamily="2" charset="-122"/>
-                <a:cs typeface="Times New Roman" panose="02020603050405020304" pitchFamily="18" charset="0"/>
-              </a:rPr>
-              <a:t>	       </a:t>
-            </a:r>
-            <a:r>
-              <a:rPr lang="en-US" altLang="zh-CN" sz="1100" b="1" spc="-35" dirty="0">
-                <a:solidFill>
-                  <a:srgbClr val="000000"/>
-                </a:solidFill>
-                <a:effectLst/>
-                <a:latin typeface="宋体" panose="02010600030101010101" pitchFamily="2" charset="-122"/>
-                <a:ea typeface="宋体" panose="02010600030101010101" pitchFamily="2" charset="-122"/>
-                <a:cs typeface="宋体" panose="02010600030101010101" pitchFamily="2" charset="-122"/>
-              </a:rPr>
-              <a:t>1st</a:t>
-            </a:r>
-            <a:r>
-              <a:rPr lang="en-US" altLang="zh-CN" sz="1100" b="1" spc="-35" dirty="0">
-                <a:effectLst/>
-                <a:latin typeface="宋体" panose="02010600030101010101" pitchFamily="2" charset="-122"/>
-                <a:ea typeface="宋体" panose="02010600030101010101" pitchFamily="2" charset="-122"/>
-                <a:cs typeface="宋体" panose="02010600030101010101" pitchFamily="2" charset="-122"/>
-              </a:rPr>
-              <a:t> </a:t>
-            </a:r>
-            <a:r>
-              <a:rPr lang="en-US" altLang="zh-CN" sz="1100" b="1" spc="-40" dirty="0">
-                <a:solidFill>
-                  <a:srgbClr val="000000"/>
-                </a:solidFill>
-                <a:effectLst/>
-                <a:latin typeface="宋体" panose="02010600030101010101" pitchFamily="2" charset="-122"/>
-                <a:ea typeface="宋体" panose="02010600030101010101" pitchFamily="2" charset="-122"/>
-                <a:cs typeface="宋体" panose="02010600030101010101" pitchFamily="2" charset="-122"/>
-              </a:rPr>
-              <a:t>Learning</a:t>
-            </a:r>
-            <a:r>
-              <a:rPr lang="en-US" altLang="zh-CN" sz="1100" b="1" spc="-40" dirty="0">
-                <a:effectLst/>
-                <a:latin typeface="宋体" panose="02010600030101010101" pitchFamily="2" charset="-122"/>
-                <a:ea typeface="宋体" panose="02010600030101010101" pitchFamily="2" charset="-122"/>
-                <a:cs typeface="宋体" panose="02010600030101010101" pitchFamily="2" charset="-122"/>
-              </a:rPr>
-              <a:t> </a:t>
-            </a:r>
-            <a:r>
-              <a:rPr lang="en-US" altLang="zh-CN" sz="1100" b="1" spc="-35" dirty="0">
-                <a:solidFill>
-                  <a:srgbClr val="000000"/>
-                </a:solidFill>
-                <a:effectLst/>
-                <a:latin typeface="宋体" panose="02010600030101010101" pitchFamily="2" charset="-122"/>
-                <a:ea typeface="宋体" panose="02010600030101010101" pitchFamily="2" charset="-122"/>
-                <a:cs typeface="宋体" panose="02010600030101010101" pitchFamily="2" charset="-122"/>
-              </a:rPr>
-              <a:t>and</a:t>
-            </a:r>
-            <a:r>
-              <a:rPr lang="en-US" altLang="zh-CN" sz="1100" b="1" spc="-40" dirty="0">
-                <a:effectLst/>
-                <a:latin typeface="宋体" panose="02010600030101010101" pitchFamily="2" charset="-122"/>
-                <a:ea typeface="宋体" panose="02010600030101010101" pitchFamily="2" charset="-122"/>
-                <a:cs typeface="宋体" panose="02010600030101010101" pitchFamily="2" charset="-122"/>
-              </a:rPr>
-              <a:t> </a:t>
-            </a:r>
-            <a:r>
-              <a:rPr lang="en-US" altLang="zh-CN" sz="1100" b="1" spc="-35" dirty="0">
-                <a:solidFill>
-                  <a:srgbClr val="000000"/>
-                </a:solidFill>
-                <a:effectLst/>
-                <a:latin typeface="宋体" panose="02010600030101010101" pitchFamily="2" charset="-122"/>
-                <a:ea typeface="宋体" panose="02010600030101010101" pitchFamily="2" charset="-122"/>
-                <a:cs typeface="宋体" panose="02010600030101010101" pitchFamily="2" charset="-122"/>
-              </a:rPr>
-              <a:t>Mining</a:t>
-            </a:r>
-            <a:r>
-              <a:rPr lang="en-US" altLang="zh-CN" sz="1100" b="1" spc="-35" dirty="0">
-                <a:effectLst/>
-                <a:latin typeface="宋体" panose="02010600030101010101" pitchFamily="2" charset="-122"/>
-                <a:ea typeface="宋体" panose="02010600030101010101" pitchFamily="2" charset="-122"/>
-                <a:cs typeface="宋体" panose="02010600030101010101" pitchFamily="2" charset="-122"/>
-              </a:rPr>
-              <a:t> </a:t>
-            </a:r>
-            <a:r>
-              <a:rPr lang="en-US" altLang="zh-CN" sz="1100" b="1" spc="-40" dirty="0">
-                <a:solidFill>
-                  <a:srgbClr val="000000"/>
-                </a:solidFill>
-                <a:effectLst/>
-                <a:latin typeface="宋体" panose="02010600030101010101" pitchFamily="2" charset="-122"/>
-                <a:ea typeface="宋体" panose="02010600030101010101" pitchFamily="2" charset="-122"/>
-                <a:cs typeface="宋体" panose="02010600030101010101" pitchFamily="2" charset="-122"/>
-              </a:rPr>
-              <a:t>with</a:t>
-            </a:r>
-            <a:r>
-              <a:rPr lang="en-US" altLang="zh-CN" sz="1100" b="1" spc="-40" dirty="0">
-                <a:effectLst/>
-                <a:latin typeface="宋体" panose="02010600030101010101" pitchFamily="2" charset="-122"/>
-                <a:ea typeface="宋体" panose="02010600030101010101" pitchFamily="2" charset="-122"/>
-                <a:cs typeface="宋体" panose="02010600030101010101" pitchFamily="2" charset="-122"/>
-              </a:rPr>
-              <a:t> </a:t>
-            </a:r>
-            <a:r>
-              <a:rPr lang="en-US" altLang="zh-CN" sz="1100" b="1" spc="-35" dirty="0">
-                <a:solidFill>
-                  <a:srgbClr val="000000"/>
-                </a:solidFill>
-                <a:effectLst/>
-                <a:latin typeface="宋体" panose="02010600030101010101" pitchFamily="2" charset="-122"/>
-                <a:ea typeface="宋体" panose="02010600030101010101" pitchFamily="2" charset="-122"/>
-                <a:cs typeface="宋体" panose="02010600030101010101" pitchFamily="2" charset="-122"/>
-              </a:rPr>
-              <a:t>Noisy</a:t>
-            </a:r>
-            <a:r>
-              <a:rPr lang="en-US" altLang="zh-CN" sz="1100" b="1" spc="-40" dirty="0">
-                <a:effectLst/>
-                <a:latin typeface="宋体" panose="02010600030101010101" pitchFamily="2" charset="-122"/>
-                <a:ea typeface="宋体" panose="02010600030101010101" pitchFamily="2" charset="-122"/>
-                <a:cs typeface="宋体" panose="02010600030101010101" pitchFamily="2" charset="-122"/>
-              </a:rPr>
-              <a:t> </a:t>
-            </a:r>
-            <a:r>
-              <a:rPr lang="en-US" altLang="zh-CN" sz="1100" b="1" spc="-40" dirty="0">
-                <a:solidFill>
-                  <a:srgbClr val="000000"/>
-                </a:solidFill>
-                <a:effectLst/>
-                <a:latin typeface="宋体" panose="02010600030101010101" pitchFamily="2" charset="-122"/>
-                <a:ea typeface="宋体" panose="02010600030101010101" pitchFamily="2" charset="-122"/>
-                <a:cs typeface="宋体" panose="02010600030101010101" pitchFamily="2" charset="-122"/>
-              </a:rPr>
-              <a:t>Labels</a:t>
-            </a:r>
-            <a:r>
-              <a:rPr lang="en-US" altLang="zh-CN" sz="1100" b="1" spc="-35" dirty="0">
-                <a:effectLst/>
-                <a:latin typeface="宋体" panose="02010600030101010101" pitchFamily="2" charset="-122"/>
-                <a:ea typeface="宋体" panose="02010600030101010101" pitchFamily="2" charset="-122"/>
-                <a:cs typeface="宋体" panose="02010600030101010101" pitchFamily="2" charset="-122"/>
-              </a:rPr>
-              <a:t> </a:t>
-            </a:r>
-            <a:r>
-              <a:rPr lang="en-US" altLang="zh-CN" sz="1100" b="1" spc="-35" dirty="0">
-                <a:solidFill>
-                  <a:srgbClr val="000000"/>
-                </a:solidFill>
-                <a:effectLst/>
-                <a:latin typeface="宋体" panose="02010600030101010101" pitchFamily="2" charset="-122"/>
-                <a:ea typeface="宋体" panose="02010600030101010101" pitchFamily="2" charset="-122"/>
-                <a:cs typeface="宋体" panose="02010600030101010101" pitchFamily="2" charset="-122"/>
-              </a:rPr>
-              <a:t>Challenge</a:t>
-            </a:r>
-            <a:r>
-              <a:rPr lang="en-US" altLang="zh-CN" sz="1100" b="1" spc="-40" dirty="0">
-                <a:effectLst/>
-                <a:latin typeface="宋体" panose="02010600030101010101" pitchFamily="2" charset="-122"/>
-                <a:ea typeface="宋体" panose="02010600030101010101" pitchFamily="2" charset="-122"/>
-                <a:cs typeface="宋体" panose="02010600030101010101" pitchFamily="2" charset="-122"/>
-              </a:rPr>
-              <a:t> </a:t>
-            </a:r>
-            <a:r>
-              <a:rPr lang="en-US" altLang="zh-CN" sz="1100" b="1" spc="-40" dirty="0">
-                <a:solidFill>
-                  <a:srgbClr val="000000"/>
-                </a:solidFill>
-                <a:effectLst/>
-                <a:latin typeface="宋体" panose="02010600030101010101" pitchFamily="2" charset="-122"/>
-                <a:ea typeface="宋体" panose="02010600030101010101" pitchFamily="2" charset="-122"/>
-                <a:cs typeface="宋体" panose="02010600030101010101" pitchFamily="2" charset="-122"/>
-              </a:rPr>
-              <a:t>IJCAI-ECAI</a:t>
-            </a:r>
-            <a:r>
-              <a:rPr lang="en-US" altLang="zh-CN" sz="1100" b="1" spc="-40" dirty="0">
-                <a:effectLst/>
-                <a:latin typeface="宋体" panose="02010600030101010101" pitchFamily="2" charset="-122"/>
-                <a:ea typeface="宋体" panose="02010600030101010101" pitchFamily="2" charset="-122"/>
-                <a:cs typeface="宋体" panose="02010600030101010101" pitchFamily="2" charset="-122"/>
-              </a:rPr>
-              <a:t> </a:t>
-            </a:r>
-            <a:r>
-              <a:rPr lang="en-US" altLang="zh-CN" sz="1100" b="1" spc="-35" dirty="0">
-                <a:solidFill>
-                  <a:srgbClr val="000000"/>
-                </a:solidFill>
-                <a:effectLst/>
-                <a:latin typeface="宋体" panose="02010600030101010101" pitchFamily="2" charset="-122"/>
-                <a:ea typeface="宋体" panose="02010600030101010101" pitchFamily="2" charset="-122"/>
-                <a:cs typeface="宋体" panose="02010600030101010101" pitchFamily="2" charset="-122"/>
-              </a:rPr>
-              <a:t>2022</a:t>
-            </a:r>
-            <a:r>
-              <a:rPr lang="en-US" altLang="zh-CN" sz="1100" b="1" spc="-40" dirty="0">
-                <a:solidFill>
-                  <a:srgbClr val="000000"/>
-                </a:solidFill>
-                <a:effectLst/>
-                <a:latin typeface="宋体" panose="02010600030101010101" pitchFamily="2" charset="-122"/>
-                <a:ea typeface="宋体" panose="02010600030101010101" pitchFamily="2" charset="-122"/>
-                <a:cs typeface="宋体" panose="02010600030101010101" pitchFamily="2" charset="-122"/>
-              </a:rPr>
-              <a:t>(</a:t>
-            </a:r>
-            <a:r>
-              <a:rPr lang="en-US" altLang="zh-CN" sz="1100" b="1" spc="-75" dirty="0" err="1">
-                <a:solidFill>
-                  <a:srgbClr val="000000"/>
-                </a:solidFill>
-                <a:effectLst/>
-                <a:latin typeface="宋体" panose="02010600030101010101" pitchFamily="2" charset="-122"/>
-                <a:ea typeface="宋体" panose="02010600030101010101" pitchFamily="2" charset="-122"/>
-                <a:cs typeface="宋体" panose="02010600030101010101" pitchFamily="2" charset="-122"/>
-              </a:rPr>
-              <a:t>关于</a:t>
-            </a:r>
-            <a:r>
-              <a:rPr lang="en-US" altLang="zh-CN" sz="1100" b="1" spc="-45" dirty="0">
-                <a:effectLst/>
-                <a:latin typeface="宋体" panose="02010600030101010101" pitchFamily="2" charset="-122"/>
-                <a:ea typeface="宋体" panose="02010600030101010101" pitchFamily="2" charset="-122"/>
-                <a:cs typeface="宋体" panose="02010600030101010101" pitchFamily="2" charset="-122"/>
-              </a:rPr>
-              <a:t> </a:t>
-            </a:r>
-            <a:r>
-              <a:rPr lang="en-US" altLang="zh-CN" sz="1100" b="1" spc="-35" dirty="0">
-                <a:solidFill>
-                  <a:srgbClr val="000000"/>
-                </a:solidFill>
-                <a:effectLst/>
-                <a:latin typeface="宋体" panose="02010600030101010101" pitchFamily="2" charset="-122"/>
-                <a:ea typeface="宋体" panose="02010600030101010101" pitchFamily="2" charset="-122"/>
-                <a:cs typeface="宋体" panose="02010600030101010101" pitchFamily="2" charset="-122"/>
-              </a:rPr>
-              <a:t>label</a:t>
-            </a:r>
-            <a:r>
-              <a:rPr lang="en-US" altLang="zh-CN" sz="1100" b="1" spc="-50" dirty="0">
-                <a:solidFill>
-                  <a:srgbClr val="000000"/>
-                </a:solidFill>
-                <a:effectLst/>
-                <a:latin typeface="宋体" panose="02010600030101010101" pitchFamily="2" charset="-122"/>
-                <a:ea typeface="宋体" panose="02010600030101010101" pitchFamily="2" charset="-122"/>
-                <a:cs typeface="宋体" panose="02010600030101010101" pitchFamily="2" charset="-122"/>
-              </a:rPr>
-              <a:t>-</a:t>
-            </a:r>
-          </a:p>
-          <a:p>
-            <a:pPr marL="883920" marR="642620">
-              <a:lnSpc>
-                <a:spcPct val="200000"/>
-              </a:lnSpc>
-              <a:spcAft>
-                <a:spcPts val="0"/>
-              </a:spcAft>
-            </a:pPr>
-            <a:r>
-              <a:rPr lang="en-US" altLang="zh-CN" sz="1100" b="1" spc="-35" dirty="0" err="1">
-                <a:solidFill>
-                  <a:srgbClr val="000000"/>
-                </a:solidFill>
-                <a:effectLst/>
-                <a:latin typeface="宋体" panose="02010600030101010101" pitchFamily="2" charset="-122"/>
-                <a:ea typeface="宋体" panose="02010600030101010101" pitchFamily="2" charset="-122"/>
-                <a:cs typeface="宋体" panose="02010600030101010101" pitchFamily="2" charset="-122"/>
-              </a:rPr>
-              <a:t>noise</a:t>
-            </a:r>
-            <a:r>
-              <a:rPr lang="en-US" altLang="zh-CN" sz="1100" b="1" spc="-70" dirty="0" err="1">
-                <a:solidFill>
-                  <a:srgbClr val="000000"/>
-                </a:solidFill>
-                <a:effectLst/>
-                <a:latin typeface="宋体" panose="02010600030101010101" pitchFamily="2" charset="-122"/>
-                <a:ea typeface="宋体" panose="02010600030101010101" pitchFamily="2" charset="-122"/>
-                <a:cs typeface="宋体" panose="02010600030101010101" pitchFamily="2" charset="-122"/>
-              </a:rPr>
-              <a:t>处理</a:t>
-            </a:r>
-            <a:r>
-              <a:rPr lang="en-US" altLang="zh-CN" sz="1100" b="1" spc="-75" dirty="0" err="1">
-                <a:solidFill>
-                  <a:srgbClr val="000000"/>
-                </a:solidFill>
-                <a:effectLst/>
-                <a:latin typeface="宋体" panose="02010600030101010101" pitchFamily="2" charset="-122"/>
-                <a:ea typeface="宋体" panose="02010600030101010101" pitchFamily="2" charset="-122"/>
-                <a:cs typeface="宋体" panose="02010600030101010101" pitchFamily="2" charset="-122"/>
-              </a:rPr>
-              <a:t>的比赛</a:t>
-            </a:r>
-            <a:r>
-              <a:rPr lang="en-US" altLang="zh-CN" sz="1100" b="1" spc="-30" dirty="0">
-                <a:solidFill>
-                  <a:srgbClr val="000000"/>
-                </a:solidFill>
-                <a:effectLst/>
-                <a:latin typeface="宋体" panose="02010600030101010101" pitchFamily="2" charset="-122"/>
-                <a:ea typeface="宋体" panose="02010600030101010101" pitchFamily="2" charset="-122"/>
-                <a:cs typeface="宋体" panose="02010600030101010101" pitchFamily="2" charset="-122"/>
-              </a:rPr>
-              <a:t>)</a:t>
-            </a:r>
-            <a:endParaRPr lang="en-US" altLang="zh-CN" sz="1100" b="1" spc="-10" dirty="0">
-              <a:solidFill>
-                <a:srgbClr val="000000"/>
-              </a:solidFill>
-              <a:effectLst/>
-              <a:latin typeface="Cambria" panose="02040503050406030204" pitchFamily="18" charset="0"/>
-              <a:ea typeface="宋体" panose="02010600030101010101" pitchFamily="2" charset="-122"/>
-              <a:cs typeface="Times New Roman" panose="02020603050405020304" pitchFamily="18" charset="0"/>
-            </a:endParaRPr>
-          </a:p>
-          <a:p>
-            <a:pPr marL="883920"/>
-            <a:r>
-              <a:rPr lang="en-US" altLang="zh-CN" sz="1100" b="1" dirty="0">
-                <a:solidFill>
-                  <a:srgbClr val="000000"/>
-                </a:solidFill>
-                <a:effectLst/>
-                <a:latin typeface="宋体" panose="02010600030101010101" pitchFamily="2" charset="-122"/>
-                <a:ea typeface="宋体" panose="02010600030101010101" pitchFamily="2" charset="-122"/>
-                <a:cs typeface="宋体" panose="02010600030101010101" pitchFamily="2" charset="-122"/>
-              </a:rPr>
-              <a:t>	   </a:t>
-            </a:r>
-            <a:r>
-              <a:rPr lang="en-US" altLang="zh-CN" sz="1100" b="1" dirty="0" err="1">
-                <a:solidFill>
-                  <a:srgbClr val="000000"/>
-                </a:solidFill>
-                <a:effectLst/>
-                <a:latin typeface="宋体" panose="02010600030101010101" pitchFamily="2" charset="-122"/>
-                <a:ea typeface="宋体" panose="02010600030101010101" pitchFamily="2" charset="-122"/>
-                <a:cs typeface="宋体" panose="02010600030101010101" pitchFamily="2" charset="-122"/>
-              </a:rPr>
-              <a:t>星火杯比赛，数模校赛，以及西电的</a:t>
-            </a:r>
-            <a:r>
-              <a:rPr lang="en-US" altLang="zh-CN" sz="1100" b="1" spc="-130" dirty="0">
-                <a:effectLst/>
-                <a:latin typeface="宋体" panose="02010600030101010101" pitchFamily="2" charset="-122"/>
-                <a:ea typeface="宋体" panose="02010600030101010101" pitchFamily="2" charset="-122"/>
-                <a:cs typeface="宋体" panose="02010600030101010101" pitchFamily="2" charset="-122"/>
-              </a:rPr>
-              <a:t> </a:t>
-            </a:r>
-            <a:r>
-              <a:rPr lang="en-US" altLang="zh-CN" sz="1100" b="1" dirty="0" err="1">
-                <a:solidFill>
-                  <a:srgbClr val="000000"/>
-                </a:solidFill>
-                <a:effectLst/>
-                <a:latin typeface="宋体" panose="02010600030101010101" pitchFamily="2" charset="-122"/>
-                <a:ea typeface="宋体" panose="02010600030101010101" pitchFamily="2" charset="-122"/>
-                <a:cs typeface="宋体" panose="02010600030101010101" pitchFamily="2" charset="-122"/>
-              </a:rPr>
-              <a:t>acm</a:t>
-            </a:r>
-            <a:r>
-              <a:rPr lang="en-US" altLang="zh-CN" sz="1100" b="1" spc="-140" dirty="0">
-                <a:effectLst/>
-                <a:latin typeface="宋体" panose="02010600030101010101" pitchFamily="2" charset="-122"/>
-                <a:ea typeface="宋体" panose="02010600030101010101" pitchFamily="2" charset="-122"/>
-                <a:cs typeface="宋体" panose="02010600030101010101" pitchFamily="2" charset="-122"/>
-              </a:rPr>
-              <a:t> </a:t>
-            </a:r>
-            <a:r>
-              <a:rPr lang="en-US" altLang="zh-CN" sz="1100" b="1" dirty="0" err="1">
-                <a:solidFill>
-                  <a:srgbClr val="000000"/>
-                </a:solidFill>
-                <a:effectLst/>
-                <a:latin typeface="宋体" panose="02010600030101010101" pitchFamily="2" charset="-122"/>
-                <a:ea typeface="宋体" panose="02010600030101010101" pitchFamily="2" charset="-122"/>
-                <a:cs typeface="宋体" panose="02010600030101010101" pitchFamily="2" charset="-122"/>
-              </a:rPr>
-              <a:t>新生赛和校赛</a:t>
-            </a:r>
-            <a:endParaRPr lang="en-US" altLang="zh-CN" sz="1100" b="1" dirty="0">
-              <a:solidFill>
-                <a:srgbClr val="000000"/>
-              </a:solidFill>
-              <a:effectLst/>
-              <a:latin typeface="宋体" panose="02010600030101010101" pitchFamily="2" charset="-122"/>
-              <a:ea typeface="宋体" panose="02010600030101010101" pitchFamily="2" charset="-122"/>
-              <a:cs typeface="宋体" panose="02010600030101010101" pitchFamily="2" charset="-122"/>
-            </a:endParaRPr>
-          </a:p>
-          <a:p>
-            <a:pPr marL="883920"/>
-            <a:endParaRPr lang="en-US" altLang="zh-CN" sz="1100" b="1" dirty="0">
-              <a:solidFill>
-                <a:srgbClr val="000000"/>
-              </a:solidFill>
-              <a:latin typeface="宋体" panose="02010600030101010101" pitchFamily="2" charset="-122"/>
-              <a:ea typeface="宋体" panose="02010600030101010101" pitchFamily="2" charset="-122"/>
-              <a:cs typeface="Times New Roman" panose="02020603050405020304" pitchFamily="18" charset="0"/>
-            </a:endParaRPr>
-          </a:p>
-          <a:p>
-            <a:pPr marL="883920"/>
-            <a:endParaRPr lang="zh-CN" altLang="zh-CN" sz="1100" dirty="0">
-              <a:effectLst/>
-              <a:latin typeface="Cambria" panose="02040503050406030204" pitchFamily="18" charset="0"/>
-              <a:ea typeface="宋体" panose="02010600030101010101" pitchFamily="2" charset="-122"/>
-              <a:cs typeface="Times New Roman" panose="02020603050405020304" pitchFamily="18" charset="0"/>
-            </a:endParaRPr>
-          </a:p>
-          <a:p>
-            <a:pPr marL="883920"/>
-            <a:r>
-              <a:rPr lang="en-US" altLang="zh-CN" sz="1100" b="1" spc="-10" dirty="0" err="1">
-                <a:solidFill>
-                  <a:srgbClr val="000000"/>
-                </a:solidFill>
-                <a:effectLst/>
-                <a:latin typeface="宋体" panose="02010600030101010101" pitchFamily="2" charset="-122"/>
-                <a:ea typeface="宋体" panose="02010600030101010101" pitchFamily="2" charset="-122"/>
-                <a:cs typeface="宋体" panose="02010600030101010101" pitchFamily="2" charset="-122"/>
-              </a:rPr>
-              <a:t>项目</a:t>
-            </a:r>
-            <a:r>
-              <a:rPr lang="en-US" altLang="zh-CN" sz="1100" b="1" spc="-5" dirty="0">
-                <a:solidFill>
-                  <a:srgbClr val="000000"/>
-                </a:solidFill>
-                <a:effectLst/>
-                <a:latin typeface="宋体" panose="02010600030101010101" pitchFamily="2" charset="-122"/>
-                <a:ea typeface="宋体" panose="02010600030101010101" pitchFamily="2" charset="-122"/>
-                <a:cs typeface="宋体" panose="02010600030101010101" pitchFamily="2" charset="-122"/>
-              </a:rPr>
-              <a:t>：</a:t>
-            </a:r>
-          </a:p>
-          <a:p>
-            <a:pPr marL="883920"/>
-            <a:r>
-              <a:rPr lang="en-US" altLang="zh-CN" sz="1100" b="1" dirty="0">
-                <a:solidFill>
-                  <a:srgbClr val="000000"/>
-                </a:solidFill>
-                <a:effectLst/>
-                <a:latin typeface="宋体" panose="02010600030101010101" pitchFamily="2" charset="-122"/>
-                <a:ea typeface="宋体" panose="02010600030101010101" pitchFamily="2" charset="-122"/>
-                <a:cs typeface="宋体" panose="02010600030101010101" pitchFamily="2" charset="-122"/>
-              </a:rPr>
-              <a:t>    </a:t>
-            </a:r>
-            <a:r>
-              <a:rPr lang="en-US" altLang="zh-CN" sz="1100" b="1" dirty="0" err="1">
-                <a:solidFill>
-                  <a:srgbClr val="000000"/>
-                </a:solidFill>
-                <a:effectLst/>
-                <a:latin typeface="宋体" panose="02010600030101010101" pitchFamily="2" charset="-122"/>
-                <a:ea typeface="宋体" panose="02010600030101010101" pitchFamily="2" charset="-122"/>
-                <a:cs typeface="宋体" panose="02010600030101010101" pitchFamily="2" charset="-122"/>
-              </a:rPr>
-              <a:t>搭建基于</a:t>
-            </a:r>
-            <a:r>
-              <a:rPr lang="en-US" altLang="zh-CN" sz="1100" b="1" spc="-110" dirty="0">
-                <a:effectLst/>
-                <a:latin typeface="宋体" panose="02010600030101010101" pitchFamily="2" charset="-122"/>
-                <a:ea typeface="宋体" panose="02010600030101010101" pitchFamily="2" charset="-122"/>
-                <a:cs typeface="宋体" panose="02010600030101010101" pitchFamily="2" charset="-122"/>
-              </a:rPr>
-              <a:t> </a:t>
-            </a:r>
-            <a:r>
-              <a:rPr lang="en-US" altLang="zh-CN" sz="1100" b="1" dirty="0">
-                <a:solidFill>
-                  <a:srgbClr val="000000"/>
-                </a:solidFill>
-                <a:effectLst/>
-                <a:latin typeface="宋体" panose="02010600030101010101" pitchFamily="2" charset="-122"/>
-                <a:ea typeface="宋体" panose="02010600030101010101" pitchFamily="2" charset="-122"/>
-                <a:cs typeface="宋体" panose="02010600030101010101" pitchFamily="2" charset="-122"/>
-              </a:rPr>
-              <a:t>K-means</a:t>
-            </a:r>
-            <a:r>
-              <a:rPr lang="en-US" altLang="zh-CN" sz="1100" b="1" spc="-115" dirty="0">
-                <a:effectLst/>
-                <a:latin typeface="宋体" panose="02010600030101010101" pitchFamily="2" charset="-122"/>
-                <a:ea typeface="宋体" panose="02010600030101010101" pitchFamily="2" charset="-122"/>
-                <a:cs typeface="宋体" panose="02010600030101010101" pitchFamily="2" charset="-122"/>
-              </a:rPr>
-              <a:t> </a:t>
-            </a:r>
-            <a:r>
-              <a:rPr lang="en-US" altLang="zh-CN" sz="1100" b="1" dirty="0" err="1">
-                <a:solidFill>
-                  <a:srgbClr val="000000"/>
-                </a:solidFill>
-                <a:effectLst/>
-                <a:latin typeface="宋体" panose="02010600030101010101" pitchFamily="2" charset="-122"/>
-                <a:ea typeface="宋体" panose="02010600030101010101" pitchFamily="2" charset="-122"/>
-                <a:cs typeface="宋体" panose="02010600030101010101" pitchFamily="2" charset="-122"/>
-              </a:rPr>
-              <a:t>算法的图像分割应用网页</a:t>
-            </a:r>
-            <a:r>
-              <a:rPr lang="en-US" altLang="zh-CN" sz="1100" b="1" dirty="0">
-                <a:solidFill>
-                  <a:srgbClr val="000000"/>
-                </a:solidFill>
-                <a:effectLst/>
-                <a:latin typeface="宋体" panose="02010600030101010101" pitchFamily="2" charset="-122"/>
-                <a:ea typeface="宋体" panose="02010600030101010101" pitchFamily="2" charset="-122"/>
-                <a:cs typeface="宋体" panose="02010600030101010101" pitchFamily="2" charset="-122"/>
-              </a:rPr>
-              <a:t>(</a:t>
-            </a:r>
-            <a:r>
-              <a:rPr lang="en-US" altLang="zh-CN" sz="1100" b="1" dirty="0" err="1">
-                <a:solidFill>
-                  <a:srgbClr val="000000"/>
-                </a:solidFill>
-                <a:effectLst/>
-                <a:latin typeface="宋体" panose="02010600030101010101" pitchFamily="2" charset="-122"/>
-                <a:ea typeface="宋体" panose="02010600030101010101" pitchFamily="2" charset="-122"/>
-                <a:cs typeface="宋体" panose="02010600030101010101" pitchFamily="2" charset="-122"/>
-              </a:rPr>
-              <a:t>其中的</a:t>
-            </a:r>
-            <a:r>
-              <a:rPr lang="en-US" altLang="zh-CN" sz="1100" b="1" spc="-115" dirty="0">
-                <a:effectLst/>
-                <a:latin typeface="宋体" panose="02010600030101010101" pitchFamily="2" charset="-122"/>
-                <a:ea typeface="宋体" panose="02010600030101010101" pitchFamily="2" charset="-122"/>
-                <a:cs typeface="宋体" panose="02010600030101010101" pitchFamily="2" charset="-122"/>
-              </a:rPr>
-              <a:t> </a:t>
-            </a:r>
-            <a:r>
-              <a:rPr lang="en-US" altLang="zh-CN" sz="1100" b="1" dirty="0">
-                <a:solidFill>
-                  <a:srgbClr val="000000"/>
-                </a:solidFill>
-                <a:effectLst/>
-                <a:latin typeface="宋体" panose="02010600030101010101" pitchFamily="2" charset="-122"/>
-                <a:ea typeface="宋体" panose="02010600030101010101" pitchFamily="2" charset="-122"/>
-                <a:cs typeface="宋体" panose="02010600030101010101" pitchFamily="2" charset="-122"/>
-              </a:rPr>
-              <a:t>K-means</a:t>
-            </a:r>
-            <a:r>
-              <a:rPr lang="en-US" altLang="zh-CN" sz="1100" b="1" spc="-120" dirty="0">
-                <a:effectLst/>
-                <a:latin typeface="宋体" panose="02010600030101010101" pitchFamily="2" charset="-122"/>
-                <a:ea typeface="宋体" panose="02010600030101010101" pitchFamily="2" charset="-122"/>
-                <a:cs typeface="宋体" panose="02010600030101010101" pitchFamily="2" charset="-122"/>
-              </a:rPr>
-              <a:t> </a:t>
-            </a:r>
-            <a:r>
-              <a:rPr lang="en-US" altLang="zh-CN" sz="1100" b="1" dirty="0" err="1">
-                <a:solidFill>
-                  <a:srgbClr val="000000"/>
-                </a:solidFill>
-                <a:effectLst/>
-                <a:latin typeface="宋体" panose="02010600030101010101" pitchFamily="2" charset="-122"/>
-                <a:ea typeface="宋体" panose="02010600030101010101" pitchFamily="2" charset="-122"/>
-                <a:cs typeface="宋体" panose="02010600030101010101" pitchFamily="2" charset="-122"/>
-              </a:rPr>
-              <a:t>算法的部分我完成</a:t>
-            </a:r>
-            <a:r>
-              <a:rPr lang="en-US" altLang="zh-CN" sz="1100" b="1" dirty="0">
-                <a:solidFill>
-                  <a:srgbClr val="000000"/>
-                </a:solidFill>
-                <a:effectLst/>
-                <a:latin typeface="宋体" panose="02010600030101010101" pitchFamily="2" charset="-122"/>
-                <a:ea typeface="宋体" panose="02010600030101010101" pitchFamily="2" charset="-122"/>
-                <a:cs typeface="宋体" panose="02010600030101010101" pitchFamily="2" charset="-122"/>
-              </a:rPr>
-              <a:t>) </a:t>
-            </a:r>
-            <a:endParaRPr lang="en-US" altLang="zh-CN" sz="1100" b="1" spc="-5" dirty="0">
-              <a:solidFill>
-                <a:srgbClr val="000000"/>
-              </a:solidFill>
-              <a:latin typeface="宋体" panose="02010600030101010101" pitchFamily="2" charset="-122"/>
-              <a:ea typeface="宋体" panose="02010600030101010101" pitchFamily="2" charset="-122"/>
-              <a:cs typeface="宋体" panose="02010600030101010101" pitchFamily="2" charset="-122"/>
-            </a:endParaRPr>
-          </a:p>
-          <a:p>
-            <a:pPr marL="883920"/>
-            <a:r>
-              <a:rPr lang="en-US" altLang="zh-CN" sz="1100" b="1" spc="-5" dirty="0">
-                <a:solidFill>
-                  <a:srgbClr val="000000"/>
-                </a:solidFill>
-                <a:effectLst/>
-                <a:latin typeface="宋体" panose="02010600030101010101" pitchFamily="2" charset="-122"/>
-                <a:ea typeface="宋体" panose="02010600030101010101" pitchFamily="2" charset="-122"/>
-                <a:cs typeface="宋体" panose="02010600030101010101" pitchFamily="2" charset="-122"/>
-              </a:rPr>
-              <a:t>	    </a:t>
-            </a:r>
-            <a:r>
-              <a:rPr lang="en-US" altLang="zh-CN" sz="1100" b="1" dirty="0" err="1">
-                <a:solidFill>
-                  <a:srgbClr val="000000"/>
-                </a:solidFill>
-                <a:effectLst/>
-                <a:latin typeface="宋体" panose="02010600030101010101" pitchFamily="2" charset="-122"/>
-                <a:ea typeface="宋体" panose="02010600030101010101" pitchFamily="2" charset="-122"/>
-                <a:cs typeface="宋体" panose="02010600030101010101" pitchFamily="2" charset="-122"/>
-              </a:rPr>
-              <a:t>基于</a:t>
-            </a:r>
-            <a:r>
-              <a:rPr lang="en-US" altLang="zh-CN" sz="1100" b="1" spc="115" dirty="0">
-                <a:effectLst/>
-                <a:latin typeface="宋体" panose="02010600030101010101" pitchFamily="2" charset="-122"/>
-                <a:ea typeface="宋体" panose="02010600030101010101" pitchFamily="2" charset="-122"/>
-                <a:cs typeface="宋体" panose="02010600030101010101" pitchFamily="2" charset="-122"/>
-              </a:rPr>
-              <a:t> </a:t>
-            </a:r>
-            <a:r>
-              <a:rPr lang="en-US" altLang="zh-CN" sz="1100" b="1" dirty="0">
-                <a:solidFill>
-                  <a:srgbClr val="000000"/>
-                </a:solidFill>
-                <a:effectLst/>
-                <a:latin typeface="宋体" panose="02010600030101010101" pitchFamily="2" charset="-122"/>
-                <a:ea typeface="宋体" panose="02010600030101010101" pitchFamily="2" charset="-122"/>
-                <a:cs typeface="宋体" panose="02010600030101010101" pitchFamily="2" charset="-122"/>
-              </a:rPr>
-              <a:t>RNN</a:t>
-            </a:r>
-            <a:r>
-              <a:rPr lang="en-US" altLang="zh-CN" sz="1100" b="1" spc="120" dirty="0">
-                <a:effectLst/>
-                <a:latin typeface="宋体" panose="02010600030101010101" pitchFamily="2" charset="-122"/>
-                <a:ea typeface="宋体" panose="02010600030101010101" pitchFamily="2" charset="-122"/>
-                <a:cs typeface="宋体" panose="02010600030101010101" pitchFamily="2" charset="-122"/>
-              </a:rPr>
-              <a:t> </a:t>
-            </a:r>
-            <a:r>
-              <a:rPr lang="en-US" altLang="zh-CN" sz="1100" b="1" dirty="0">
-                <a:solidFill>
-                  <a:srgbClr val="000000"/>
-                </a:solidFill>
-                <a:effectLst/>
-                <a:latin typeface="宋体" panose="02010600030101010101" pitchFamily="2" charset="-122"/>
-                <a:ea typeface="宋体" panose="02010600030101010101" pitchFamily="2" charset="-122"/>
-                <a:cs typeface="宋体" panose="02010600030101010101" pitchFamily="2" charset="-122"/>
-              </a:rPr>
-              <a:t>backbone</a:t>
-            </a:r>
-            <a:r>
-              <a:rPr lang="en-US" altLang="zh-CN" sz="1100" b="1" spc="120" dirty="0">
-                <a:effectLst/>
-                <a:latin typeface="宋体" panose="02010600030101010101" pitchFamily="2" charset="-122"/>
-                <a:ea typeface="宋体" panose="02010600030101010101" pitchFamily="2" charset="-122"/>
-                <a:cs typeface="宋体" panose="02010600030101010101" pitchFamily="2" charset="-122"/>
-              </a:rPr>
-              <a:t> </a:t>
-            </a:r>
-            <a:r>
-              <a:rPr lang="en-US" altLang="zh-CN" sz="1100" b="1" dirty="0" err="1">
-                <a:solidFill>
-                  <a:srgbClr val="000000"/>
-                </a:solidFill>
-                <a:effectLst/>
-                <a:latin typeface="宋体" panose="02010600030101010101" pitchFamily="2" charset="-122"/>
-                <a:ea typeface="宋体" panose="02010600030101010101" pitchFamily="2" charset="-122"/>
-                <a:cs typeface="宋体" panose="02010600030101010101" pitchFamily="2" charset="-122"/>
-              </a:rPr>
-              <a:t>的智能歌曲创作</a:t>
-            </a:r>
-            <a:r>
-              <a:rPr lang="en-US" altLang="zh-CN" sz="1100" b="1" dirty="0">
-                <a:solidFill>
-                  <a:srgbClr val="000000"/>
-                </a:solidFill>
-                <a:effectLst/>
-                <a:latin typeface="宋体" panose="02010600030101010101" pitchFamily="2" charset="-122"/>
-                <a:ea typeface="宋体" panose="02010600030101010101" pitchFamily="2" charset="-122"/>
-                <a:cs typeface="宋体" panose="02010600030101010101" pitchFamily="2" charset="-122"/>
-              </a:rPr>
-              <a:t> </a:t>
-            </a:r>
-            <a:endParaRPr lang="zh-CN" altLang="zh-CN" sz="1100" dirty="0">
-              <a:effectLst/>
-              <a:latin typeface="Cambria" panose="02040503050406030204" pitchFamily="18" charset="0"/>
-              <a:ea typeface="宋体" panose="02010600030101010101" pitchFamily="2" charset="-122"/>
-              <a:cs typeface="Times New Roman" panose="02020603050405020304" pitchFamily="18" charset="0"/>
-            </a:endParaRPr>
-          </a:p>
-          <a:p>
-            <a:pPr marL="1150620">
-              <a:spcBef>
-                <a:spcPts val="10"/>
-              </a:spcBef>
-              <a:spcAft>
-                <a:spcPts val="0"/>
-              </a:spcAft>
-            </a:pPr>
-            <a:r>
-              <a:rPr lang="en-US" altLang="zh-CN" sz="1100" b="1" spc="-5" dirty="0" err="1">
-                <a:solidFill>
-                  <a:srgbClr val="000000"/>
-                </a:solidFill>
-                <a:effectLst/>
-                <a:latin typeface="宋体" panose="02010600030101010101" pitchFamily="2" charset="-122"/>
-                <a:ea typeface="宋体" panose="02010600030101010101" pitchFamily="2" charset="-122"/>
-                <a:cs typeface="宋体" panose="02010600030101010101" pitchFamily="2" charset="-122"/>
-              </a:rPr>
-              <a:t>图像模型中鲁棒性的对比研究数据</a:t>
-            </a:r>
-            <a:r>
-              <a:rPr lang="en-US" altLang="zh-CN" sz="1100" b="1" spc="-10" dirty="0" err="1">
-                <a:solidFill>
-                  <a:srgbClr val="000000"/>
-                </a:solidFill>
-                <a:effectLst/>
-                <a:latin typeface="宋体" panose="02010600030101010101" pitchFamily="2" charset="-122"/>
-                <a:ea typeface="宋体" panose="02010600030101010101" pitchFamily="2" charset="-122"/>
-                <a:cs typeface="宋体" panose="02010600030101010101" pitchFamily="2" charset="-122"/>
-              </a:rPr>
-              <a:t>收集</a:t>
-            </a:r>
-            <a:endParaRPr lang="zh-CN" altLang="zh-CN" sz="1100" dirty="0">
-              <a:effectLst/>
-              <a:latin typeface="Cambria" panose="02040503050406030204" pitchFamily="18" charset="0"/>
-              <a:ea typeface="宋体" panose="02010600030101010101" pitchFamily="2" charset="-122"/>
-              <a:cs typeface="Times New Roman" panose="02020603050405020304" pitchFamily="18" charset="0"/>
-            </a:endParaRPr>
-          </a:p>
-          <a:p>
-            <a:pPr marL="1150620"/>
-            <a:r>
-              <a:rPr lang="en-US" altLang="zh-CN" sz="1100" b="1" spc="-40" dirty="0" err="1">
-                <a:solidFill>
-                  <a:srgbClr val="000000"/>
-                </a:solidFill>
-                <a:effectLst/>
-                <a:latin typeface="宋体" panose="02010600030101010101" pitchFamily="2" charset="-122"/>
-                <a:ea typeface="宋体" panose="02010600030101010101" pitchFamily="2" charset="-122"/>
-                <a:cs typeface="宋体" panose="02010600030101010101" pitchFamily="2" charset="-122"/>
-              </a:rPr>
-              <a:t>其他的关于平时的</a:t>
-            </a:r>
-            <a:r>
-              <a:rPr lang="en-US" altLang="zh-CN" sz="1100" b="1" spc="-15" dirty="0">
-                <a:effectLst/>
-                <a:latin typeface="宋体" panose="02010600030101010101" pitchFamily="2" charset="-122"/>
-                <a:ea typeface="宋体" panose="02010600030101010101" pitchFamily="2" charset="-122"/>
-                <a:cs typeface="宋体" panose="02010600030101010101" pitchFamily="2" charset="-122"/>
-              </a:rPr>
-              <a:t> </a:t>
-            </a:r>
-            <a:r>
-              <a:rPr lang="en-US" altLang="zh-CN" sz="1100" b="1" spc="-15" dirty="0">
-                <a:solidFill>
-                  <a:srgbClr val="000000"/>
-                </a:solidFill>
-                <a:effectLst/>
-                <a:latin typeface="宋体" panose="02010600030101010101" pitchFamily="2" charset="-122"/>
-                <a:ea typeface="宋体" panose="02010600030101010101" pitchFamily="2" charset="-122"/>
-                <a:cs typeface="宋体" panose="02010600030101010101" pitchFamily="2" charset="-122"/>
-              </a:rPr>
-              <a:t>A</a:t>
-            </a:r>
-            <a:r>
-              <a:rPr lang="en-US" altLang="zh-CN" sz="1100" b="1" spc="-20" dirty="0">
-                <a:solidFill>
-                  <a:srgbClr val="000000"/>
-                </a:solidFill>
-                <a:effectLst/>
-                <a:latin typeface="宋体" panose="02010600030101010101" pitchFamily="2" charset="-122"/>
-                <a:ea typeface="宋体" panose="02010600030101010101" pitchFamily="2" charset="-122"/>
-                <a:cs typeface="宋体" panose="02010600030101010101" pitchFamily="2" charset="-122"/>
-              </a:rPr>
-              <a:t>I</a:t>
-            </a:r>
-            <a:r>
-              <a:rPr lang="en-US" altLang="zh-CN" sz="1100" b="1" spc="-20" dirty="0">
-                <a:effectLst/>
-                <a:latin typeface="宋体" panose="02010600030101010101" pitchFamily="2" charset="-122"/>
-                <a:ea typeface="宋体" panose="02010600030101010101" pitchFamily="2" charset="-122"/>
-                <a:cs typeface="宋体" panose="02010600030101010101" pitchFamily="2" charset="-122"/>
-              </a:rPr>
-              <a:t> </a:t>
-            </a:r>
-            <a:r>
-              <a:rPr lang="en-US" altLang="zh-CN" sz="1100" b="1" spc="-40" dirty="0" err="1">
-                <a:solidFill>
-                  <a:srgbClr val="000000"/>
-                </a:solidFill>
-                <a:effectLst/>
-                <a:latin typeface="宋体" panose="02010600030101010101" pitchFamily="2" charset="-122"/>
-                <a:ea typeface="宋体" panose="02010600030101010101" pitchFamily="2" charset="-122"/>
-                <a:cs typeface="宋体" panose="02010600030101010101" pitchFamily="2" charset="-122"/>
-              </a:rPr>
-              <a:t>的项目</a:t>
-            </a:r>
-            <a:endParaRPr lang="en-US" altLang="zh-CN" sz="1100" b="1" dirty="0">
-              <a:solidFill>
-                <a:srgbClr val="575757"/>
-              </a:solidFill>
-              <a:latin typeface="Timess New Roman"/>
-            </a:endParaRPr>
-          </a:p>
-        </p:txBody>
-      </p:sp>
-      <p:sp>
-        <p:nvSpPr>
           <p:cNvPr id="2" name="文本框 1">
             <a:extLst>
               <a:ext uri="{FF2B5EF4-FFF2-40B4-BE49-F238E27FC236}">
@@ -8207,8 +6417,8 @@
         </p:nvSpPr>
         <p:spPr>
           <a:xfrm>
-            <a:off x="1609188" y="1129379"/>
-            <a:ext cx="2369046" cy="769441"/>
+            <a:off x="1427882" y="1111168"/>
+            <a:ext cx="2731657" cy="738664"/>
           </a:xfrm>
           <a:prstGeom prst="rect">
             <a:avLst/>
@@ -8222,66 +6432,83 @@
           <a:lstStyle/>
           <a:p>
             <a:r>
-              <a:rPr lang="zh-CN" altLang="en-US" sz="1100" dirty="0"/>
-              <a:t>学  校</a:t>
-            </a:r>
-            <a:r>
-              <a:rPr lang="en-US" altLang="zh-CN" sz="1100" dirty="0"/>
+              <a:rPr lang="zh-CN" altLang="en-US" sz="1050" b="1" kern="2700" dirty="0">
+                <a:cs typeface="Calibri" panose="020F0502020204030204" pitchFamily="34" charset="0"/>
+              </a:rPr>
+              <a:t>学         校</a:t>
+            </a:r>
+            <a:r>
+              <a:rPr lang="en-US" altLang="zh-CN" sz="1050" dirty="0">
+                <a:cs typeface="Calibri" panose="020F0502020204030204" pitchFamily="34" charset="0"/>
+              </a:rPr>
               <a:t>: </a:t>
             </a:r>
             <a:r>
-              <a:rPr lang="zh-CN" altLang="en-US" sz="1100" dirty="0"/>
+              <a:rPr lang="zh-CN" altLang="en-US" sz="1050" dirty="0">
+                <a:cs typeface="Calibri" panose="020F0502020204030204" pitchFamily="34" charset="0"/>
+              </a:rPr>
               <a:t>西安电子科技大学</a:t>
             </a:r>
-            <a:endParaRPr lang="en-US" altLang="zh-CN" sz="1100" dirty="0"/>
-          </a:p>
-          <a:p>
-            <a:r>
-              <a:rPr lang="zh-CN" altLang="en-US" sz="1100" dirty="0"/>
-              <a:t>联系方式：</a:t>
-            </a:r>
-            <a:r>
-              <a:rPr lang="en-US" altLang="zh-CN" sz="1100" dirty="0"/>
-              <a:t>18007350482</a:t>
-            </a:r>
-          </a:p>
-          <a:p>
-            <a:r>
-              <a:rPr lang="zh-CN" altLang="en-US" sz="1100" dirty="0"/>
-              <a:t>邮箱：</a:t>
-            </a:r>
-            <a:r>
-              <a:rPr lang="en-US" altLang="zh-CN" sz="1100" dirty="0">
-                <a:hlinkClick r:id="rId11"/>
+            <a:endParaRPr lang="en-US" altLang="zh-CN" sz="1050" dirty="0">
+              <a:cs typeface="Calibri" panose="020F0502020204030204" pitchFamily="34" charset="0"/>
+            </a:endParaRPr>
+          </a:p>
+          <a:p>
+            <a:r>
+              <a:rPr lang="zh-CN" altLang="en-US" sz="1050" b="1" dirty="0">
+                <a:cs typeface="Calibri" panose="020F0502020204030204" pitchFamily="34" charset="0"/>
               </a:rPr>
-              <a:t>ykzhou@stu.xidian.edu.cn</a:t>
-            </a:r>
-            <a:endParaRPr lang="en-US" altLang="zh-CN" sz="1100" dirty="0"/>
-          </a:p>
-          <a:p>
-            <a:r>
-              <a:rPr lang="en-US" altLang="zh-CN" sz="1100" dirty="0"/>
-              <a:t>GitHub: </a:t>
-            </a:r>
-            <a:r>
-              <a:rPr lang="en-US" altLang="zh-CN" sz="1100" dirty="0">
-                <a:hlinkClick r:id="rId12"/>
+              <a:t>联系方式</a:t>
+            </a:r>
+            <a:r>
+              <a:rPr lang="en-US" altLang="zh-CN" sz="1050" dirty="0">
+                <a:cs typeface="Calibri" panose="020F0502020204030204" pitchFamily="34" charset="0"/>
               </a:rPr>
-              <a:t>1zeryu (</a:t>
-            </a:r>
-            <a:r>
-              <a:rPr lang="zh-CN" altLang="en-US" sz="1100" dirty="0">
-                <a:hlinkClick r:id="rId12"/>
+              <a:t>: 18007350482</a:t>
+            </a:r>
+          </a:p>
+          <a:p>
+            <a:r>
+              <a:rPr lang="zh-CN" altLang="en-US" sz="1050" b="1" dirty="0">
+                <a:cs typeface="Calibri" panose="020F0502020204030204" pitchFamily="34" charset="0"/>
               </a:rPr>
-              <a:t>周钰坤</a:t>
-            </a:r>
-            <a:r>
-              <a:rPr lang="en-US" altLang="zh-CN" sz="1100" dirty="0">
-                <a:hlinkClick r:id="rId12"/>
+              <a:t>邮         箱</a:t>
+            </a:r>
+            <a:r>
+              <a:rPr lang="en-US" altLang="zh-CN" sz="1050" dirty="0">
+                <a:cs typeface="Calibri" panose="020F0502020204030204" pitchFamily="34" charset="0"/>
               </a:rPr>
-              <a:t>) (github.com)</a:t>
-            </a:r>
-            <a:endParaRPr lang="zh-CN" altLang="en-US" sz="1100" dirty="0"/>
+              <a:t>: ykzhou@stu.xidian.edu.cn</a:t>
+            </a:r>
+          </a:p>
+          <a:p>
+            <a:r>
+              <a:rPr lang="en-US" altLang="zh-CN" sz="1050" b="1" kern="1500" spc="220" dirty="0" err="1">
+                <a:cs typeface="Calibri" panose="020F0502020204030204" pitchFamily="34" charset="0"/>
+              </a:rPr>
+              <a:t>GitHub</a:t>
+            </a:r>
+            <a:r>
+              <a:rPr lang="en-US" altLang="zh-CN" sz="1050" kern="1500" spc="220" dirty="0" err="1">
+                <a:cs typeface="Calibri" panose="020F0502020204030204" pitchFamily="34" charset="0"/>
+              </a:rPr>
+              <a:t>:</a:t>
+            </a:r>
+            <a:r>
+              <a:rPr lang="en-US" altLang="zh-CN" sz="1050" kern="1500" spc="100" dirty="0" err="1">
+                <a:cs typeface="Calibri" panose="020F0502020204030204" pitchFamily="34" charset="0"/>
+              </a:rPr>
+              <a:t>https</a:t>
+            </a:r>
+            <a:r>
+              <a:rPr lang="en-US" altLang="zh-CN" sz="1050" kern="1500" spc="100" dirty="0">
+                <a:cs typeface="Calibri" panose="020F0502020204030204" pitchFamily="34" charset="0"/>
+              </a:rPr>
+              <a:t>://github.com/1zeryu</a:t>
+            </a:r>
+            <a:endParaRPr lang="zh-CN" altLang="en-US" sz="1050" spc="100" dirty="0">
+              <a:cs typeface="Calibri" panose="020F0502020204030204" pitchFamily="34" charset="0"/>
+            </a:endParaRPr>
           </a:p>
         </p:txBody>
       </p:sp>
@@ -8299,8 +6526,8 @@
         </p:nvSpPr>
         <p:spPr>
           <a:xfrm>
-            <a:off x="3898016" y="1121346"/>
-            <a:ext cx="1874259" cy="938719"/>
+            <a:off x="3863340" y="1114688"/>
+            <a:ext cx="1874259" cy="577081"/>
           </a:xfrm>
           <a:prstGeom prst="rect">
             <a:avLst/>
@@ -8314,56 +6541,43 @@
           <a:lstStyle/>
           <a:p>
             <a:r>
-              <a:rPr lang="zh-CN" altLang="en-US" sz="1100" dirty="0"/>
-              <a:t>出生年月：</a:t>
-            </a:r>
-            <a:r>
-              <a:rPr lang="en-US" altLang="zh-CN" sz="1100" dirty="0"/>
-              <a:t>2003.11.02</a:t>
-            </a:r>
-          </a:p>
-          <a:p>
-            <a:r>
-              <a:rPr lang="zh-CN" altLang="en-US" sz="1100" dirty="0"/>
-              <a:t>专业：计算机大类</a:t>
-            </a:r>
-            <a:endParaRPr lang="en-US" altLang="zh-CN" sz="1100" dirty="0"/>
-          </a:p>
-          <a:p>
-            <a:r>
-              <a:rPr lang="zh-CN" altLang="en-US" sz="1100" dirty="0"/>
-              <a:t>籍贯：湖南郴州</a:t>
-            </a:r>
-            <a:endParaRPr lang="en-US" altLang="zh-CN" sz="1100" dirty="0"/>
-          </a:p>
-          <a:p>
-            <a:r>
-              <a:rPr lang="zh-CN" altLang="en-US" sz="1100" dirty="0"/>
-              <a:t>个人博客</a:t>
-            </a:r>
-            <a:r>
-              <a:rPr lang="en-US" altLang="zh-CN" sz="1100" dirty="0"/>
-              <a:t>: </a:t>
-            </a:r>
-            <a:r>
-              <a:rPr lang="en-US" altLang="zh-CN" sz="1100" dirty="0">
-                <a:hlinkClick r:id="rId13"/>
-              </a:rPr>
-              <a:t>1zeryu - </a:t>
-            </a:r>
-            <a:r>
-              <a:rPr lang="zh-CN" altLang="en-US" sz="1100" dirty="0">
-                <a:hlinkClick r:id="rId13"/>
-              </a:rPr>
-              <a:t>博客园 </a:t>
-            </a:r>
-            <a:r>
-              <a:rPr lang="en-US" altLang="zh-CN" sz="1100" dirty="0">
-                <a:hlinkClick r:id="rId13"/>
-              </a:rPr>
-              <a:t>(cnblogs.com)</a:t>
-            </a:r>
-            <a:endParaRPr lang="en-US" altLang="zh-CN" sz="1100" dirty="0"/>
+              <a:rPr lang="zh-CN" altLang="en-US" sz="1050" b="1" dirty="0"/>
+              <a:t>出生年月</a:t>
+            </a:r>
+            <a:r>
+              <a:rPr lang="en-US" altLang="zh-CN" sz="1050" dirty="0"/>
+              <a:t>: 2003.11.02</a:t>
+            </a:r>
+          </a:p>
+          <a:p>
+            <a:r>
+              <a:rPr lang="zh-CN" altLang="en-US" sz="1050" b="1" dirty="0"/>
+              <a:t>专         业</a:t>
+            </a:r>
+            <a:r>
+              <a:rPr lang="en-US" altLang="zh-CN" sz="1050" dirty="0"/>
+              <a:t>:</a:t>
+            </a:r>
+            <a:r>
+              <a:rPr lang="zh-CN" altLang="en-US" sz="1050" dirty="0"/>
+              <a:t> 计算机科学与技术</a:t>
+            </a:r>
+            <a:endParaRPr lang="en-US" altLang="zh-CN" sz="1050" dirty="0"/>
+          </a:p>
+          <a:p>
+            <a:r>
+              <a:rPr lang="zh-CN" altLang="en-US" sz="1050" b="1" dirty="0"/>
+              <a:t>籍         贯</a:t>
+            </a:r>
+            <a:r>
+              <a:rPr lang="en-US" altLang="zh-CN" sz="1050" dirty="0"/>
+              <a:t>:</a:t>
+            </a:r>
+            <a:r>
+              <a:rPr lang="zh-CN" altLang="en-US" sz="1050" dirty="0"/>
+              <a:t> 湖南郴州</a:t>
+            </a:r>
+            <a:endParaRPr lang="en-US" altLang="zh-CN" sz="1050" dirty="0"/>
           </a:p>
         </p:txBody>
       </p:sp>
@@ -8382,7 +6596,7 @@
         <p:spPr>
           <a:xfrm>
             <a:off x="688608" y="2460342"/>
-            <a:ext cx="1837776" cy="430887"/>
+            <a:ext cx="1837776" cy="807913"/>
           </a:xfrm>
           <a:prstGeom prst="rect">
             <a:avLst/>
@@ -8396,24 +6610,42 @@
           <a:lstStyle/>
           <a:p>
             <a:r>
-              <a:rPr lang="zh-CN" altLang="en-US" sz="1100" dirty="0"/>
-              <a:t>大类成绩：大类成绩前</a:t>
-            </a:r>
-            <a:r>
-              <a:rPr lang="en-US" altLang="zh-CN" sz="1100" dirty="0"/>
-              <a:t>10%</a:t>
-            </a:r>
-          </a:p>
-          <a:p>
-            <a:r>
-              <a:rPr lang="zh-CN" altLang="en-US" sz="1100" dirty="0"/>
+              <a:rPr lang="zh-CN" altLang="en-US" sz="900" dirty="0"/>
+              <a:t>大类成绩：专业成绩前</a:t>
+            </a:r>
+            <a:r>
+              <a:rPr lang="en-US" altLang="zh-CN" sz="900" dirty="0"/>
+              <a:t>5%</a:t>
+            </a:r>
+          </a:p>
+          <a:p>
+            <a:r>
+              <a:rPr lang="zh-CN" altLang="en-US" sz="900" dirty="0"/>
               <a:t>四级成绩：</a:t>
             </a:r>
             <a:r>
-              <a:rPr lang="en-US" altLang="zh-CN" sz="1100" dirty="0"/>
+              <a:rPr lang="en-US" altLang="zh-CN" sz="900" dirty="0"/>
               <a:t>543</a:t>
             </a:r>
-            <a:endParaRPr lang="zh-CN" altLang="en-US" sz="1100" dirty="0"/>
+          </a:p>
+          <a:p>
+            <a:r>
+              <a:rPr lang="zh-CN" altLang="en-US" sz="900" dirty="0"/>
+              <a:t>大类均分：</a:t>
+            </a:r>
+            <a:r>
+              <a:rPr lang="en-US" altLang="zh-CN" sz="900" dirty="0"/>
+              <a:t>89.6</a:t>
+            </a:r>
+          </a:p>
+          <a:p>
+            <a:r>
+              <a:rPr lang="en-US" altLang="zh-CN" sz="900" dirty="0"/>
+              <a:t>GPA: 3.80/4.00</a:t>
+            </a:r>
+          </a:p>
+          <a:p>
+            <a:endParaRPr lang="zh-CN" altLang="en-US" sz="1050" dirty="0"/>
           </a:p>
         </p:txBody>
       </p:sp>
@@ -8431,8 +6663,8 @@
         </p:nvSpPr>
         <p:spPr>
           <a:xfrm>
-            <a:off x="2695888" y="2460342"/>
-            <a:ext cx="2139257" cy="430887"/>
+            <a:off x="2526222" y="2460341"/>
+            <a:ext cx="2139257" cy="784830"/>
           </a:xfrm>
           <a:prstGeom prst="rect">
             <a:avLst/>
@@ -8446,19 +6678,54 @@
           <a:lstStyle/>
           <a:p>
             <a:r>
-              <a:rPr lang="zh-CN" altLang="en-US" sz="1100" dirty="0"/>
-              <a:t>大类均分：</a:t>
-            </a:r>
-            <a:r>
-              <a:rPr lang="en-US" altLang="zh-CN" sz="1100" dirty="0"/>
-              <a:t>89.6</a:t>
-            </a:r>
-          </a:p>
-          <a:p>
-            <a:r>
-              <a:rPr lang="en-US" altLang="zh-CN" sz="1100" dirty="0"/>
-              <a:t>GPA: 3.80/4.00</a:t>
-            </a:r>
+              <a:rPr lang="zh-CN" altLang="en-US" sz="900" dirty="0"/>
+              <a:t>程序设计基础课程设计</a:t>
+            </a:r>
+            <a:r>
+              <a:rPr lang="en-US" altLang="zh-CN" sz="900" dirty="0"/>
+              <a:t>: 97</a:t>
+            </a:r>
+          </a:p>
+          <a:p>
+            <a:r>
+              <a:rPr lang="zh-CN" altLang="en-US" sz="900" dirty="0"/>
+              <a:t>高等数学</a:t>
+            </a:r>
+            <a:r>
+              <a:rPr lang="en-US" altLang="zh-CN" sz="900" dirty="0"/>
+              <a:t>: 94</a:t>
+            </a:r>
+          </a:p>
+          <a:p>
+            <a:r>
+              <a:rPr lang="zh-CN" altLang="en-US" sz="900" dirty="0"/>
+              <a:t>离散数学（</a:t>
+            </a:r>
+            <a:r>
+              <a:rPr lang="en-US" altLang="zh-CN" sz="900" dirty="0"/>
+              <a:t>Ⅰ</a:t>
+            </a:r>
+            <a:r>
+              <a:rPr lang="zh-CN" altLang="en-US" sz="900" dirty="0"/>
+              <a:t>）</a:t>
+            </a:r>
+            <a:r>
+              <a:rPr lang="en-US" altLang="zh-CN" sz="900" dirty="0"/>
+              <a:t>: 95</a:t>
+            </a:r>
+          </a:p>
+          <a:p>
+            <a:r>
+              <a:rPr lang="zh-CN" altLang="en-US" sz="900" dirty="0"/>
+              <a:t>计算机导论与程序设计</a:t>
+            </a:r>
+            <a:r>
+              <a:rPr lang="en-US" altLang="zh-CN" sz="900" dirty="0"/>
+              <a:t>: 100</a:t>
+            </a:r>
+          </a:p>
+          <a:p>
+            <a:endParaRPr lang="en-US" altLang="zh-CN" sz="900" dirty="0"/>
           </a:p>
         </p:txBody>
       </p:sp>
@@ -8477,7 +6744,7 @@
           <p:nvPr/>
         </p:nvPicPr>
         <p:blipFill>
-          <a:blip r:embed="rId14"/>
+          <a:blip r:embed="rId11"/>
           <a:stretch>
             <a:fillRect/>
           </a:stretch>
@@ -8492,6 +6759,49 @@
           </a:prstGeom>
         </p:spPr>
       </p:pic>
+      <p:sp>
+        <p:nvSpPr>
+          <p:cNvPr id="19" name="文本框 18">
+            <a:extLst>
+              <a:ext uri="{FF2B5EF4-FFF2-40B4-BE49-F238E27FC236}">
+                <a16:creationId xmlns:a16="http://schemas.microsoft.com/office/drawing/2014/main" id="{D12E2049-6B15-7273-83CA-51954F72CB4F}"/>
+              </a:ext>
+            </a:extLst>
+          </p:cNvPr>
+          <p:cNvSpPr txBox="1"/>
+          <p:nvPr/>
+        </p:nvSpPr>
+        <p:spPr>
+          <a:xfrm>
+            <a:off x="4236908" y="2459483"/>
+            <a:ext cx="1828801" cy="369332"/>
+          </a:xfrm>
+          <a:prstGeom prst="rect">
+            <a:avLst/>
+          </a:prstGeom>
+          <a:noFill/>
+        </p:spPr>
+        <p:txBody>
+          <a:bodyPr wrap="square" rtlCol="0">
+            <a:spAutoFit/>
+          </a:bodyPr>
+          <a:lstStyle/>
+          <a:p>
+            <a:r>
+              <a:rPr lang="zh-CN" altLang="en-US" sz="900" dirty="0"/>
+              <a:t>科研方法论</a:t>
+            </a:r>
+            <a:r>
+              <a:rPr lang="en-US" altLang="zh-CN" sz="900" dirty="0"/>
+              <a:t>: 95</a:t>
+            </a:r>
+            <a:endParaRPr lang="zh-CN" altLang="en-US" sz="900" dirty="0"/>
+          </a:p>
+          <a:p>
+            <a:endParaRPr lang="zh-CN" altLang="en-US" sz="900" dirty="0"/>
+          </a:p>
+        </p:txBody>
+      </p:sp>
     </p:spTree>
     <p:extLst>
       <p:ext uri="{BB962C8B-B14F-4D97-AF65-F5344CB8AC3E}">

--- a/简历.pptx
+++ b/简历.pptx
@@ -197,7 +197,7 @@
           <a:p>
             <a:fld id="{0BE7DB68-C3DE-4005-A345-EC79EE75BF95}" type="datetimeFigureOut">
               <a:rPr lang="zh-CN" altLang="en-US" smtClean="0"/>
-              <a:t>2022/8/7</a:t>
+              <a:t>2022/8/11</a:t>
             </a:fld>
             <a:endParaRPr lang="zh-CN" altLang="en-US"/>
           </a:p>
@@ -679,7 +679,7 @@
           <a:p>
             <a:fld id="{9C780448-4F8B-4562-AA03-CE48F3C559E5}" type="datetimeFigureOut">
               <a:rPr lang="zh-CN" altLang="en-US" smtClean="0"/>
-              <a:t>2022/8/7</a:t>
+              <a:t>2022/8/11</a:t>
             </a:fld>
             <a:endParaRPr lang="zh-CN" altLang="en-US"/>
           </a:p>
@@ -849,7 +849,7 @@
           <a:p>
             <a:fld id="{9C780448-4F8B-4562-AA03-CE48F3C559E5}" type="datetimeFigureOut">
               <a:rPr lang="zh-CN" altLang="en-US" smtClean="0"/>
-              <a:t>2022/8/7</a:t>
+              <a:t>2022/8/11</a:t>
             </a:fld>
             <a:endParaRPr lang="zh-CN" altLang="en-US"/>
           </a:p>
@@ -1029,7 +1029,7 @@
           <a:p>
             <a:fld id="{9C780448-4F8B-4562-AA03-CE48F3C559E5}" type="datetimeFigureOut">
               <a:rPr lang="zh-CN" altLang="en-US" smtClean="0"/>
-              <a:t>2022/8/7</a:t>
+              <a:t>2022/8/11</a:t>
             </a:fld>
             <a:endParaRPr lang="zh-CN" altLang="en-US"/>
           </a:p>
@@ -1199,7 +1199,7 @@
           <a:p>
             <a:fld id="{9C780448-4F8B-4562-AA03-CE48F3C559E5}" type="datetimeFigureOut">
               <a:rPr lang="zh-CN" altLang="en-US" smtClean="0"/>
-              <a:t>2022/8/7</a:t>
+              <a:t>2022/8/11</a:t>
             </a:fld>
             <a:endParaRPr lang="zh-CN" altLang="en-US"/>
           </a:p>
@@ -1443,7 +1443,7 @@
           <a:p>
             <a:fld id="{9C780448-4F8B-4562-AA03-CE48F3C559E5}" type="datetimeFigureOut">
               <a:rPr lang="zh-CN" altLang="en-US" smtClean="0"/>
-              <a:t>2022/8/7</a:t>
+              <a:t>2022/8/11</a:t>
             </a:fld>
             <a:endParaRPr lang="zh-CN" altLang="en-US"/>
           </a:p>
@@ -1675,7 +1675,7 @@
           <a:p>
             <a:fld id="{9C780448-4F8B-4562-AA03-CE48F3C559E5}" type="datetimeFigureOut">
               <a:rPr lang="zh-CN" altLang="en-US" smtClean="0"/>
-              <a:t>2022/8/7</a:t>
+              <a:t>2022/8/11</a:t>
             </a:fld>
             <a:endParaRPr lang="zh-CN" altLang="en-US"/>
           </a:p>
@@ -2042,7 +2042,7 @@
           <a:p>
             <a:fld id="{9C780448-4F8B-4562-AA03-CE48F3C559E5}" type="datetimeFigureOut">
               <a:rPr lang="zh-CN" altLang="en-US" smtClean="0"/>
-              <a:t>2022/8/7</a:t>
+              <a:t>2022/8/11</a:t>
             </a:fld>
             <a:endParaRPr lang="zh-CN" altLang="en-US"/>
           </a:p>
@@ -2160,7 +2160,7 @@
           <a:p>
             <a:fld id="{9C780448-4F8B-4562-AA03-CE48F3C559E5}" type="datetimeFigureOut">
               <a:rPr lang="zh-CN" altLang="en-US" smtClean="0"/>
-              <a:t>2022/8/7</a:t>
+              <a:t>2022/8/11</a:t>
             </a:fld>
             <a:endParaRPr lang="zh-CN" altLang="en-US"/>
           </a:p>
@@ -2255,7 +2255,7 @@
           <a:p>
             <a:fld id="{9C780448-4F8B-4562-AA03-CE48F3C559E5}" type="datetimeFigureOut">
               <a:rPr lang="zh-CN" altLang="en-US" smtClean="0"/>
-              <a:t>2022/8/7</a:t>
+              <a:t>2022/8/11</a:t>
             </a:fld>
             <a:endParaRPr lang="zh-CN" altLang="en-US"/>
           </a:p>
@@ -2532,7 +2532,7 @@
           <a:p>
             <a:fld id="{9C780448-4F8B-4562-AA03-CE48F3C559E5}" type="datetimeFigureOut">
               <a:rPr lang="zh-CN" altLang="en-US" smtClean="0"/>
-              <a:t>2022/8/7</a:t>
+              <a:t>2022/8/11</a:t>
             </a:fld>
             <a:endParaRPr lang="zh-CN" altLang="en-US"/>
           </a:p>
@@ -2789,7 +2789,7 @@
           <a:p>
             <a:fld id="{9C780448-4F8B-4562-AA03-CE48F3C559E5}" type="datetimeFigureOut">
               <a:rPr lang="zh-CN" altLang="en-US" smtClean="0"/>
-              <a:t>2022/8/7</a:t>
+              <a:t>2022/8/11</a:t>
             </a:fld>
             <a:endParaRPr lang="zh-CN" altLang="en-US"/>
           </a:p>
@@ -3002,7 +3002,7 @@
           <a:p>
             <a:fld id="{9C780448-4F8B-4562-AA03-CE48F3C559E5}" type="datetimeFigureOut">
               <a:rPr lang="zh-CN" altLang="en-US" smtClean="0"/>
-              <a:t>2022/8/7</a:t>
+              <a:t>2022/8/11</a:t>
             </a:fld>
             <a:endParaRPr lang="zh-CN" altLang="en-US"/>
           </a:p>
@@ -4062,8 +4062,8 @@
         </p:nvSpPr>
         <p:spPr>
           <a:xfrm>
-            <a:off x="217805" y="1204198"/>
-            <a:ext cx="1357378" cy="523220"/>
+            <a:off x="146732" y="984553"/>
+            <a:ext cx="1357378" cy="954107"/>
           </a:xfrm>
           <a:prstGeom prst="rect">
             <a:avLst/>
@@ -4078,15 +4078,42 @@
           <a:p>
             <a:pPr algn="ctr"/>
             <a:r>
-              <a:rPr lang="zh-CN" altLang="en-US" sz="2800" dirty="0">
+              <a:rPr lang="en-US" altLang="zh-CN" sz="2800" dirty="0">
                 <a:solidFill>
                   <a:srgbClr val="575757"/>
                 </a:solidFill>
                 <a:latin typeface="华文新魏" panose="02010800040101010101" pitchFamily="2" charset="-122"/>
                 <a:ea typeface="华文新魏" panose="02010800040101010101" pitchFamily="2" charset="-122"/>
               </a:rPr>
-              <a:t>周钰坤</a:t>
-            </a:r>
+              <a:t>Yu-</a:t>
+            </a:r>
+            <a:r>
+              <a:rPr lang="en-US" altLang="zh-CN" sz="2800" dirty="0" err="1">
+                <a:solidFill>
+                  <a:srgbClr val="575757"/>
+                </a:solidFill>
+                <a:latin typeface="华文新魏" panose="02010800040101010101" pitchFamily="2" charset="-122"/>
+                <a:ea typeface="华文新魏" panose="02010800040101010101" pitchFamily="2" charset="-122"/>
+              </a:rPr>
+              <a:t>Kun</a:t>
+            </a:r>
+            <a:r>
+              <a:rPr lang="en-US" altLang="zh-CN" sz="2800" dirty="0">
+                <a:solidFill>
+                  <a:srgbClr val="575757"/>
+                </a:solidFill>
+                <a:latin typeface="华文新魏" panose="02010800040101010101" pitchFamily="2" charset="-122"/>
+                <a:ea typeface="华文新魏" panose="02010800040101010101" pitchFamily="2" charset="-122"/>
+              </a:rPr>
+              <a:t> Zhou</a:t>
+            </a:r>
+            <a:endParaRPr lang="zh-CN" altLang="en-US" sz="2800" dirty="0">
+              <a:solidFill>
+                <a:srgbClr val="575757"/>
+              </a:solidFill>
+              <a:latin typeface="华文新魏" panose="02010800040101010101" pitchFamily="2" charset="-122"/>
+              <a:ea typeface="华文新魏" panose="02010800040101010101" pitchFamily="2" charset="-122"/>
+            </a:endParaRPr>
           </a:p>
         </p:txBody>
       </p:sp>
@@ -6432,16 +6459,10 @@
           <a:lstStyle/>
           <a:p>
             <a:r>
-              <a:rPr lang="zh-CN" altLang="en-US" sz="1050" b="1" kern="2700" dirty="0">
+              <a:rPr lang="en-US" altLang="zh-CN" sz="1050">
                 <a:cs typeface="Calibri" panose="020F0502020204030204" pitchFamily="34" charset="0"/>
               </a:rPr>
-              <a:t>学         校</a:t>
-            </a:r>
-            <a:r>
-              <a:rPr lang="en-US" altLang="zh-CN" sz="1050" dirty="0">
-                <a:cs typeface="Calibri" panose="020F0502020204030204" pitchFamily="34" charset="0"/>
-              </a:rPr>
-              <a:t>: </a:t>
+              <a:t>School: </a:t>
             </a:r>
             <a:r>
               <a:rPr lang="zh-CN" altLang="en-US" sz="1050" dirty="0">
